--- a/xcheck/wattson_power_results_final_KF_9_10_2026.pptx
+++ b/xcheck/wattson_power_results_final_KF_9_10_2026.pptx
@@ -10,6 +10,7 @@
     <p:sldId id="258" r:id="rId4"/>
     <p:sldId id="259" r:id="rId5"/>
     <p:sldId id="260" r:id="rId6"/>
+    <p:sldId id="270" r:id="rId22"/>
     <p:sldId id="261" r:id="rId7"/>
     <p:sldId id="262" r:id="rId8"/>
     <p:sldId id="263" r:id="rId9"/>
@@ -3826,7 +3827,7 @@
                 </a:solidFill>
                 <a:latin typeface="Calibri"/>
               </a:rPr>
-              <a:t>10</a:t>
+              <a:t>11</a:t>
             </a:r>
           </a:p>
         </p:txBody>
@@ -5650,7 +5651,7 @@
                 </a:solidFill>
                 <a:latin typeface="Calibri"/>
               </a:rPr>
-              <a:t>11</a:t>
+              <a:t>12</a:t>
             </a:r>
           </a:p>
         </p:txBody>
@@ -6725,7 +6726,7 @@
                 </a:solidFill>
                 <a:latin typeface="Calibri"/>
               </a:rPr>
-              <a:t>14</a:t>
+              <a:t>15</a:t>
             </a:r>
           </a:p>
         </p:txBody>
@@ -7549,7 +7550,7 @@
                 </a:solidFill>
                 <a:latin typeface="Verdana"/>
               </a:rPr>
-              <a:t>12</a:t>
+              <a:t>13</a:t>
             </a:r>
           </a:p>
         </p:txBody>
@@ -8606,7 +8607,7 @@
                 </a:solidFill>
                 <a:latin typeface="Verdana"/>
               </a:rPr>
-              <a:t>13</a:t>
+              <a:t>14</a:t>
             </a:r>
           </a:p>
         </p:txBody>
@@ -9550,6 +9551,1202 @@
                 <a:latin typeface="Verdana"/>
               </a:rPr>
               <a:t>The spreadsheet keeps its job. It just stops being multiplied by a number nobody can trace to anything.</a:t>
+            </a:r>
+          </a:p>
+        </p:txBody>
+      </p:sp>
+    </p:spTree>
+  </p:cSld>
+  <p:clrMapOvr>
+    <a:masterClrMapping/>
+  </p:clrMapOvr>
+</p:sld>
+</file>
+
+<file path=ppt/slides/slide15.xml><?xml version="1.0" encoding="utf-8"?>
+<p:sld xmlns:a="http://schemas.openxmlformats.org/drawingml/2006/main" xmlns:p="http://schemas.openxmlformats.org/presentationml/2006/main" xmlns:r="http://schemas.openxmlformats.org/officeDocument/2006/relationships">
+  <p:cSld>
+    <p:spTree>
+      <p:nvGrpSpPr>
+        <p:cNvPr id="1" name=""/>
+        <p:cNvGrpSpPr/>
+        <p:nvPr/>
+      </p:nvGrpSpPr>
+      <p:grpSpPr/>
+      <p:sp>
+        <p:nvSpPr>
+          <p:cNvPr id="2" name="Rectangle 1"/>
+          <p:cNvSpPr/>
+          <p:nvPr/>
+        </p:nvSpPr>
+        <p:spPr>
+          <a:xfrm>
+            <a:off x="0" y="0"/>
+            <a:ext cx="12192000" cy="841248"/>
+          </a:xfrm>
+          <a:prstGeom prst="rect">
+            <a:avLst/>
+          </a:prstGeom>
+          <a:solidFill>
+            <a:srgbClr val="202124"/>
+          </a:solidFill>
+          <a:ln>
+            <a:noFill/>
+          </a:ln>
+        </p:spPr>
+        <p:style>
+          <a:lnRef idx="1">
+            <a:schemeClr val="accent1"/>
+          </a:lnRef>
+          <a:fillRef idx="3">
+            <a:schemeClr val="accent1"/>
+          </a:fillRef>
+          <a:effectRef idx="2">
+            <a:schemeClr val="accent1"/>
+          </a:effectRef>
+          <a:fontRef idx="minor">
+            <a:schemeClr val="lt1"/>
+          </a:fontRef>
+        </p:style>
+        <p:txBody>
+          <a:bodyPr rtlCol="0" anchor="ctr"/>
+          <a:lstStyle/>
+          <a:p>
+            <a:pPr algn="ctr"/>
+          </a:p>
+        </p:txBody>
+      </p:sp>
+      <p:sp>
+        <p:nvSpPr>
+          <p:cNvPr id="3" name="TextBox 2"/>
+          <p:cNvSpPr txBox="1"/>
+          <p:nvPr/>
+        </p:nvSpPr>
+        <p:spPr>
+          <a:xfrm>
+            <a:off x="548640" y="118872"/>
+            <a:ext cx="11155680" cy="603504"/>
+          </a:xfrm>
+          <a:prstGeom prst="rect">
+            <a:avLst/>
+          </a:prstGeom>
+          <a:noFill/>
+        </p:spPr>
+        <p:txBody>
+          <a:bodyPr wrap="square">
+            <a:spAutoFit/>
+          </a:bodyPr>
+          <a:lstStyle/>
+          <a:p>
+            <a:pPr algn="l"/>
+            <a:r>
+              <a:rPr sz="2600" b="1">
+                <a:solidFill>
+                  <a:srgbClr val="FFFFFF"/>
+                </a:solidFill>
+                <a:latin typeface="Verdana"/>
+              </a:rPr>
+              <a:t>Part 1 — Pushing the bandwidth corner</a:t>
+            </a:r>
+          </a:p>
+        </p:txBody>
+      </p:sp>
+      <p:sp>
+        <p:nvSpPr>
+          <p:cNvPr id="4" name="Rectangle 3"/>
+          <p:cNvSpPr/>
+          <p:nvPr/>
+        </p:nvSpPr>
+        <p:spPr>
+          <a:xfrm>
+            <a:off x="0" y="841248"/>
+            <a:ext cx="12192000" cy="38100"/>
+          </a:xfrm>
+          <a:prstGeom prst="rect">
+            <a:avLst/>
+          </a:prstGeom>
+          <a:solidFill>
+            <a:srgbClr val="1F5CA8"/>
+          </a:solidFill>
+          <a:ln>
+            <a:noFill/>
+          </a:ln>
+        </p:spPr>
+        <p:style>
+          <a:lnRef idx="1">
+            <a:schemeClr val="accent1"/>
+          </a:lnRef>
+          <a:fillRef idx="3">
+            <a:schemeClr val="accent1"/>
+          </a:fillRef>
+          <a:effectRef idx="2">
+            <a:schemeClr val="accent1"/>
+          </a:effectRef>
+          <a:fontRef idx="minor">
+            <a:schemeClr val="lt1"/>
+          </a:fontRef>
+        </p:style>
+        <p:txBody>
+          <a:bodyPr rtlCol="0" anchor="ctr"/>
+          <a:lstStyle/>
+          <a:p>
+            <a:pPr algn="ctr"/>
+          </a:p>
+        </p:txBody>
+      </p:sp>
+      <p:sp>
+        <p:nvSpPr>
+          <p:cNvPr id="5" name="TextBox 4"/>
+          <p:cNvSpPr txBox="1"/>
+          <p:nvPr/>
+        </p:nvSpPr>
+        <p:spPr>
+          <a:xfrm>
+            <a:off x="548640" y="969264"/>
+            <a:ext cx="11155680" cy="365760"/>
+          </a:xfrm>
+          <a:prstGeom prst="rect">
+            <a:avLst/>
+          </a:prstGeom>
+          <a:noFill/>
+        </p:spPr>
+        <p:txBody>
+          <a:bodyPr wrap="square">
+            <a:spAutoFit/>
+          </a:bodyPr>
+          <a:lstStyle/>
+          <a:p>
+            <a:pPr algn="l"/>
+            <a:r>
+              <a:rPr sz="1200" b="0">
+                <a:solidFill>
+                  <a:srgbClr val="5F6368"/>
+                </a:solidFill>
+                <a:latin typeface="Verdana"/>
+              </a:rPr>
+              <a:t>The 50 applications top out at 0.60 GB/s for a real workload, but the model is fitted to 14 GB/s. These were written to occupy that gap.</a:t>
+            </a:r>
+          </a:p>
+        </p:txBody>
+      </p:sp>
+      <p:sp>
+        <p:nvSpPr>
+          <p:cNvPr id="6" name="TextBox 5"/>
+          <p:cNvSpPr txBox="1"/>
+          <p:nvPr/>
+        </p:nvSpPr>
+        <p:spPr>
+          <a:xfrm>
+            <a:off x="548640" y="6528816"/>
+            <a:ext cx="10424160" cy="274320"/>
+          </a:xfrm>
+          <a:prstGeom prst="rect">
+            <a:avLst/>
+          </a:prstGeom>
+          <a:noFill/>
+        </p:spPr>
+        <p:txBody>
+          <a:bodyPr wrap="square">
+            <a:spAutoFit/>
+          </a:bodyPr>
+          <a:lstStyle/>
+          <a:p>
+            <a:pPr algn="l"/>
+            <a:r>
+              <a:rPr sz="950" b="0">
+                <a:solidFill>
+                  <a:srgbClr val="5F6368"/>
+                </a:solidFill>
+                <a:latin typeface="Verdana"/>
+              </a:rPr>
+              <a:t>wattson power · rails MEASURED on IMX95LPD5EVK-19 (NXP BCU) · A55 die 40–41 °C under load · activity DERIVED from QEMU TCG · 2026-09-10</a:t>
+            </a:r>
+          </a:p>
+        </p:txBody>
+      </p:sp>
+      <p:sp>
+        <p:nvSpPr>
+          <p:cNvPr id="7" name="TextBox 6"/>
+          <p:cNvSpPr txBox="1"/>
+          <p:nvPr/>
+        </p:nvSpPr>
+        <p:spPr>
+          <a:xfrm>
+            <a:off x="11430000" y="6528816"/>
+            <a:ext cx="457200" cy="274320"/>
+          </a:xfrm>
+          <a:prstGeom prst="rect">
+            <a:avLst/>
+          </a:prstGeom>
+          <a:noFill/>
+        </p:spPr>
+        <p:txBody>
+          <a:bodyPr wrap="square">
+            <a:spAutoFit/>
+          </a:bodyPr>
+          <a:lstStyle/>
+          <a:p>
+            <a:pPr algn="r"/>
+            <a:r>
+              <a:rPr sz="950" b="0">
+                <a:solidFill>
+                  <a:srgbClr val="5F6368"/>
+                </a:solidFill>
+                <a:latin typeface="Verdana"/>
+              </a:rPr>
+              <a:t>6</a:t>
+            </a:r>
+          </a:p>
+        </p:txBody>
+      </p:sp>
+      <p:sp>
+        <p:nvSpPr>
+          <p:cNvPr id="8" name="Rectangle 7"/>
+          <p:cNvSpPr/>
+          <p:nvPr/>
+        </p:nvSpPr>
+        <p:spPr>
+          <a:xfrm>
+            <a:off x="548640" y="1572768"/>
+            <a:ext cx="11064240" cy="548640"/>
+          </a:xfrm>
+          <a:prstGeom prst="rect">
+            <a:avLst/>
+          </a:prstGeom>
+          <a:solidFill>
+            <a:srgbClr val="1F5CA8"/>
+          </a:solidFill>
+          <a:ln>
+            <a:noFill/>
+          </a:ln>
+        </p:spPr>
+        <p:style>
+          <a:lnRef idx="1">
+            <a:schemeClr val="accent1"/>
+          </a:lnRef>
+          <a:fillRef idx="3">
+            <a:schemeClr val="accent1"/>
+          </a:fillRef>
+          <a:effectRef idx="2">
+            <a:schemeClr val="accent1"/>
+          </a:effectRef>
+          <a:fontRef idx="minor">
+            <a:schemeClr val="lt1"/>
+          </a:fontRef>
+        </p:style>
+        <p:txBody>
+          <a:bodyPr rtlCol="0" anchor="ctr"/>
+          <a:lstStyle/>
+          <a:p>
+            <a:pPr algn="ctr"/>
+          </a:p>
+        </p:txBody>
+      </p:sp>
+      <p:sp>
+        <p:nvSpPr>
+          <p:cNvPr id="9" name="TextBox 8"/>
+          <p:cNvSpPr txBox="1"/>
+          <p:nvPr/>
+        </p:nvSpPr>
+        <p:spPr>
+          <a:xfrm>
+            <a:off x="822960" y="1645920"/>
+            <a:ext cx="10607040" cy="420624"/>
+          </a:xfrm>
+          <a:prstGeom prst="rect">
+            <a:avLst/>
+          </a:prstGeom>
+          <a:noFill/>
+        </p:spPr>
+        <p:txBody>
+          <a:bodyPr wrap="square">
+            <a:spAutoFit/>
+          </a:bodyPr>
+          <a:lstStyle/>
+          <a:p>
+            <a:pPr algn="l"/>
+            <a:r>
+              <a:rPr sz="1700" b="1">
+                <a:solidFill>
+                  <a:srgbClr val="FFFFFF"/>
+                </a:solidFill>
+                <a:latin typeface="Verdana"/>
+              </a:rPr>
+              <a:t>Exercised to 11 GB/s — 18x the corpus maximum. It holds on reads, and breaks on writes.</a:t>
+            </a:r>
+          </a:p>
+        </p:txBody>
+      </p:sp>
+      <p:graphicFrame>
+        <p:nvGraphicFramePr>
+          <p:cNvPr id="10" name="Table 9"/>
+          <p:cNvGraphicFramePr>
+            <a:graphicFrameLocks noGrp="1"/>
+          </p:cNvGraphicFramePr>
+          <p:nvPr/>
+        </p:nvGraphicFramePr>
+        <p:xfrm>
+          <a:off x="548640" y="2286000"/>
+          <a:ext cx="11064240" cy="2414016"/>
+        </p:xfrm>
+        <a:graphic>
+          <a:graphicData uri="http://schemas.openxmlformats.org/drawingml/2006/table">
+            <a:tbl>
+              <a:tblPr firstRow="1" bandRow="1">
+                <a:tableStyleId>{5C22544A-7EE6-4342-B048-85BDC9FD1C3A}</a:tableStyleId>
+              </a:tblPr>
+              <a:tblGrid>
+                <a:gridCol w="4114800"/>
+                <a:gridCol w="1234440"/>
+                <a:gridCol w="1325880"/>
+                <a:gridCol w="1371600"/>
+                <a:gridCol w="1371600"/>
+                <a:gridCol w="1645920"/>
+              </a:tblGrid>
+              <a:tr h="402336">
+                <a:tc>
+                  <a:txBody>
+                    <a:bodyPr/>
+                    <a:lstStyle/>
+                    <a:p>
+                      <a:r>
+                        <a:rPr sz="1150" b="1">
+                          <a:solidFill>
+                            <a:srgbClr val="FFFFFF"/>
+                          </a:solidFill>
+                          <a:latin typeface="Calibri"/>
+                        </a:rPr>
+                        <a:t>workload</a:t>
+                      </a:r>
+                    </a:p>
+                  </a:txBody>
+                  <a:tcPr>
+                    <a:solidFill>
+                      <a:srgbClr val="202124"/>
+                    </a:solidFill>
+                  </a:tcPr>
+                </a:tc>
+                <a:tc>
+                  <a:txBody>
+                    <a:bodyPr/>
+                    <a:lstStyle/>
+                    <a:p>
+                      <a:r>
+                        <a:rPr sz="1150" b="1">
+                          <a:solidFill>
+                            <a:srgbClr val="FFFFFF"/>
+                          </a:solidFill>
+                          <a:latin typeface="Calibri"/>
+                        </a:rPr>
+                        <a:t>GB/s</a:t>
+                      </a:r>
+                    </a:p>
+                  </a:txBody>
+                  <a:tcPr>
+                    <a:solidFill>
+                      <a:srgbClr val="202124"/>
+                    </a:solidFill>
+                  </a:tcPr>
+                </a:tc>
+                <a:tc>
+                  <a:txBody>
+                    <a:bodyPr/>
+                    <a:lstStyle/>
+                    <a:p>
+                      <a:r>
+                        <a:rPr sz="1150" b="1">
+                          <a:solidFill>
+                            <a:srgbClr val="FFFFFF"/>
+                          </a:solidFill>
+                          <a:latin typeface="Calibri"/>
+                        </a:rPr>
+                        <a:t>ALU M/s</a:t>
+                      </a:r>
+                    </a:p>
+                  </a:txBody>
+                  <a:tcPr>
+                    <a:solidFill>
+                      <a:srgbClr val="202124"/>
+                    </a:solidFill>
+                  </a:tcPr>
+                </a:tc>
+                <a:tc>
+                  <a:txBody>
+                    <a:bodyPr/>
+                    <a:lstStyle/>
+                    <a:p>
+                      <a:r>
+                        <a:rPr sz="1150" b="1">
+                          <a:solidFill>
+                            <a:srgbClr val="FFFFFF"/>
+                          </a:solidFill>
+                          <a:latin typeface="Calibri"/>
+                        </a:rPr>
+                        <a:t>pred mW</a:t>
+                      </a:r>
+                    </a:p>
+                  </a:txBody>
+                  <a:tcPr>
+                    <a:solidFill>
+                      <a:srgbClr val="202124"/>
+                    </a:solidFill>
+                  </a:tcPr>
+                </a:tc>
+                <a:tc>
+                  <a:txBody>
+                    <a:bodyPr/>
+                    <a:lstStyle/>
+                    <a:p>
+                      <a:r>
+                        <a:rPr sz="1150" b="1">
+                          <a:solidFill>
+                            <a:srgbClr val="FFFFFF"/>
+                          </a:solidFill>
+                          <a:latin typeface="Calibri"/>
+                        </a:rPr>
+                        <a:t>meas mW</a:t>
+                      </a:r>
+                    </a:p>
+                  </a:txBody>
+                  <a:tcPr>
+                    <a:solidFill>
+                      <a:srgbClr val="202124"/>
+                    </a:solidFill>
+                  </a:tcPr>
+                </a:tc>
+                <a:tc>
+                  <a:txBody>
+                    <a:bodyPr/>
+                    <a:lstStyle/>
+                    <a:p>
+                      <a:r>
+                        <a:rPr sz="1150" b="1">
+                          <a:solidFill>
+                            <a:srgbClr val="FFFFFF"/>
+                          </a:solidFill>
+                          <a:latin typeface="Calibri"/>
+                        </a:rPr>
+                        <a:t>err</a:t>
+                      </a:r>
+                    </a:p>
+                  </a:txBody>
+                  <a:tcPr>
+                    <a:solidFill>
+                      <a:srgbClr val="202124"/>
+                    </a:solidFill>
+                  </a:tcPr>
+                </a:tc>
+              </a:tr>
+              <a:tr h="402336">
+                <a:tc>
+                  <a:txBody>
+                    <a:bodyPr/>
+                    <a:lstStyle/>
+                    <a:p>
+                      <a:r>
+                        <a:rPr sz="1150" b="1">
+                          <a:latin typeface="Calibri"/>
+                        </a:rPr>
+                        <a:t>blit 4MB — large memcpy (replicate)</a:t>
+                      </a:r>
+                    </a:p>
+                  </a:txBody>
+                  <a:tcPr>
+                    <a:solidFill>
+                      <a:srgbClr val="EFF3F9"/>
+                    </a:solidFill>
+                  </a:tcPr>
+                </a:tc>
+                <a:tc>
+                  <a:txBody>
+                    <a:bodyPr/>
+                    <a:lstStyle/>
+                    <a:p>
+                      <a:r>
+                        <a:rPr sz="1150" b="0">
+                          <a:latin typeface="Calibri"/>
+                        </a:rPr>
+                        <a:t>11.12</a:t>
+                      </a:r>
+                    </a:p>
+                  </a:txBody>
+                  <a:tcPr>
+                    <a:solidFill>
+                      <a:srgbClr val="EFF3F9"/>
+                    </a:solidFill>
+                  </a:tcPr>
+                </a:tc>
+                <a:tc>
+                  <a:txBody>
+                    <a:bodyPr/>
+                    <a:lstStyle/>
+                    <a:p>
+                      <a:r>
+                        <a:rPr sz="1150" b="0">
+                          <a:latin typeface="Calibri"/>
+                        </a:rPr>
+                        <a:t>290</a:t>
+                      </a:r>
+                    </a:p>
+                  </a:txBody>
+                  <a:tcPr>
+                    <a:solidFill>
+                      <a:srgbClr val="EFF3F9"/>
+                    </a:solidFill>
+                  </a:tcPr>
+                </a:tc>
+                <a:tc>
+                  <a:txBody>
+                    <a:bodyPr/>
+                    <a:lstStyle/>
+                    <a:p>
+                      <a:r>
+                        <a:rPr sz="1150" b="0">
+                          <a:latin typeface="Calibri"/>
+                        </a:rPr>
+                        <a:t>2203</a:t>
+                      </a:r>
+                    </a:p>
+                  </a:txBody>
+                  <a:tcPr>
+                    <a:solidFill>
+                      <a:srgbClr val="EFF3F9"/>
+                    </a:solidFill>
+                  </a:tcPr>
+                </a:tc>
+                <a:tc>
+                  <a:txBody>
+                    <a:bodyPr/>
+                    <a:lstStyle/>
+                    <a:p>
+                      <a:r>
+                        <a:rPr sz="1150" b="0">
+                          <a:latin typeface="Calibri"/>
+                        </a:rPr>
+                        <a:t>1944</a:t>
+                      </a:r>
+                    </a:p>
+                  </a:txBody>
+                  <a:tcPr>
+                    <a:solidFill>
+                      <a:srgbClr val="EFF3F9"/>
+                    </a:solidFill>
+                  </a:tcPr>
+                </a:tc>
+                <a:tc>
+                  <a:txBody>
+                    <a:bodyPr/>
+                    <a:lstStyle/>
+                    <a:p>
+                      <a:r>
+                        <a:rPr sz="1150" b="1">
+                          <a:solidFill>
+                            <a:srgbClr val="B06000"/>
+                          </a:solidFill>
+                          <a:latin typeface="Calibri"/>
+                        </a:rPr>
+                        <a:t>13.3%</a:t>
+                      </a:r>
+                    </a:p>
+                  </a:txBody>
+                  <a:tcPr>
+                    <a:solidFill>
+                      <a:srgbClr val="EFF3F9"/>
+                    </a:solidFill>
+                  </a:tcPr>
+                </a:tc>
+              </a:tr>
+              <a:tr h="402336">
+                <a:tc>
+                  <a:txBody>
+                    <a:bodyPr/>
+                    <a:lstStyle/>
+                    <a:p>
+                      <a:r>
+                        <a:rPr sz="1150" b="1">
+                          <a:latin typeface="Calibri"/>
+                        </a:rPr>
+                        <a:t>blit 256MB — large memcpy</a:t>
+                      </a:r>
+                    </a:p>
+                  </a:txBody>
+                  <a:tcPr>
+                    <a:solidFill>
+                      <a:srgbClr val="FFFFFF"/>
+                    </a:solidFill>
+                  </a:tcPr>
+                </a:tc>
+                <a:tc>
+                  <a:txBody>
+                    <a:bodyPr/>
+                    <a:lstStyle/>
+                    <a:p>
+                      <a:r>
+                        <a:rPr sz="1150" b="0">
+                          <a:latin typeface="Calibri"/>
+                        </a:rPr>
+                        <a:t>10.85</a:t>
+                      </a:r>
+                    </a:p>
+                  </a:txBody>
+                  <a:tcPr>
+                    <a:solidFill>
+                      <a:srgbClr val="FFFFFF"/>
+                    </a:solidFill>
+                  </a:tcPr>
+                </a:tc>
+                <a:tc>
+                  <a:txBody>
+                    <a:bodyPr/>
+                    <a:lstStyle/>
+                    <a:p>
+                      <a:r>
+                        <a:rPr sz="1150" b="0">
+                          <a:latin typeface="Calibri"/>
+                        </a:rPr>
+                        <a:t>283</a:t>
+                      </a:r>
+                    </a:p>
+                  </a:txBody>
+                  <a:tcPr>
+                    <a:solidFill>
+                      <a:srgbClr val="FFFFFF"/>
+                    </a:solidFill>
+                  </a:tcPr>
+                </a:tc>
+                <a:tc>
+                  <a:txBody>
+                    <a:bodyPr/>
+                    <a:lstStyle/>
+                    <a:p>
+                      <a:r>
+                        <a:rPr sz="1150" b="0">
+                          <a:latin typeface="Calibri"/>
+                        </a:rPr>
+                        <a:t>2180</a:t>
+                      </a:r>
+                    </a:p>
+                  </a:txBody>
+                  <a:tcPr>
+                    <a:solidFill>
+                      <a:srgbClr val="FFFFFF"/>
+                    </a:solidFill>
+                  </a:tcPr>
+                </a:tc>
+                <a:tc>
+                  <a:txBody>
+                    <a:bodyPr/>
+                    <a:lstStyle/>
+                    <a:p>
+                      <a:r>
+                        <a:rPr sz="1150" b="0">
+                          <a:latin typeface="Calibri"/>
+                        </a:rPr>
+                        <a:t>1947</a:t>
+                      </a:r>
+                    </a:p>
+                  </a:txBody>
+                  <a:tcPr>
+                    <a:solidFill>
+                      <a:srgbClr val="FFFFFF"/>
+                    </a:solidFill>
+                  </a:tcPr>
+                </a:tc>
+                <a:tc>
+                  <a:txBody>
+                    <a:bodyPr/>
+                    <a:lstStyle/>
+                    <a:p>
+                      <a:r>
+                        <a:rPr sz="1150" b="1">
+                          <a:solidFill>
+                            <a:srgbClr val="B06000"/>
+                          </a:solidFill>
+                          <a:latin typeface="Calibri"/>
+                        </a:rPr>
+                        <a:t>12.0%</a:t>
+                      </a:r>
+                    </a:p>
+                  </a:txBody>
+                  <a:tcPr>
+                    <a:solidFill>
+                      <a:srgbClr val="FFFFFF"/>
+                    </a:solidFill>
+                  </a:tcPr>
+                </a:tc>
+              </a:tr>
+              <a:tr h="402336">
+                <a:tc>
+                  <a:txBody>
+                    <a:bodyPr/>
+                    <a:lstStyle/>
+                    <a:p>
+                      <a:r>
+                        <a:rPr sz="1150" b="1">
+                          <a:latin typeface="Calibri"/>
+                        </a:rPr>
+                        <a:t>reduce 256MB — array reduction</a:t>
+                      </a:r>
+                    </a:p>
+                  </a:txBody>
+                  <a:tcPr>
+                    <a:solidFill>
+                      <a:srgbClr val="EFF3F9"/>
+                    </a:solidFill>
+                  </a:tcPr>
+                </a:tc>
+                <a:tc>
+                  <a:txBody>
+                    <a:bodyPr/>
+                    <a:lstStyle/>
+                    <a:p>
+                      <a:r>
+                        <a:rPr sz="1150" b="0">
+                          <a:latin typeface="Calibri"/>
+                        </a:rPr>
+                        <a:t>5.47</a:t>
+                      </a:r>
+                    </a:p>
+                  </a:txBody>
+                  <a:tcPr>
+                    <a:solidFill>
+                      <a:srgbClr val="EFF3F9"/>
+                    </a:solidFill>
+                  </a:tcPr>
+                </a:tc>
+                <a:tc>
+                  <a:txBody>
+                    <a:bodyPr/>
+                    <a:lstStyle/>
+                    <a:p>
+                      <a:r>
+                        <a:rPr sz="1150" b="0">
+                          <a:latin typeface="Calibri"/>
+                        </a:rPr>
+                        <a:t>512</a:t>
+                      </a:r>
+                    </a:p>
+                  </a:txBody>
+                  <a:tcPr>
+                    <a:solidFill>
+                      <a:srgbClr val="EFF3F9"/>
+                    </a:solidFill>
+                  </a:tcPr>
+                </a:tc>
+                <a:tc>
+                  <a:txBody>
+                    <a:bodyPr/>
+                    <a:lstStyle/>
+                    <a:p>
+                      <a:r>
+                        <a:rPr sz="1150" b="0">
+                          <a:latin typeface="Calibri"/>
+                        </a:rPr>
+                        <a:t>1774</a:t>
+                      </a:r>
+                    </a:p>
+                  </a:txBody>
+                  <a:tcPr>
+                    <a:solidFill>
+                      <a:srgbClr val="EFF3F9"/>
+                    </a:solidFill>
+                  </a:tcPr>
+                </a:tc>
+                <a:tc>
+                  <a:txBody>
+                    <a:bodyPr/>
+                    <a:lstStyle/>
+                    <a:p>
+                      <a:r>
+                        <a:rPr sz="1150" b="0">
+                          <a:latin typeface="Calibri"/>
+                        </a:rPr>
+                        <a:t>1797</a:t>
+                      </a:r>
+                    </a:p>
+                  </a:txBody>
+                  <a:tcPr>
+                    <a:solidFill>
+                      <a:srgbClr val="EFF3F9"/>
+                    </a:solidFill>
+                  </a:tcPr>
+                </a:tc>
+                <a:tc>
+                  <a:txBody>
+                    <a:bodyPr/>
+                    <a:lstStyle/>
+                    <a:p>
+                      <a:r>
+                        <a:rPr sz="1150" b="1">
+                          <a:solidFill>
+                            <a:srgbClr val="187A33"/>
+                          </a:solidFill>
+                          <a:latin typeface="Calibri"/>
+                        </a:rPr>
+                        <a:t>1.3%</a:t>
+                      </a:r>
+                    </a:p>
+                  </a:txBody>
+                  <a:tcPr>
+                    <a:solidFill>
+                      <a:srgbClr val="EFF3F9"/>
+                    </a:solidFill>
+                  </a:tcPr>
+                </a:tc>
+              </a:tr>
+              <a:tr h="402336">
+                <a:tc>
+                  <a:txBody>
+                    <a:bodyPr/>
+                    <a:lstStyle/>
+                    <a:p>
+                      <a:r>
+                        <a:rPr sz="1150" b="1">
+                          <a:latin typeface="Calibri"/>
+                        </a:rPr>
+                        <a:t>spmv 64MB — sparse gather</a:t>
+                      </a:r>
+                    </a:p>
+                  </a:txBody>
+                  <a:tcPr>
+                    <a:solidFill>
+                      <a:srgbClr val="FFFFFF"/>
+                    </a:solidFill>
+                  </a:tcPr>
+                </a:tc>
+                <a:tc>
+                  <a:txBody>
+                    <a:bodyPr/>
+                    <a:lstStyle/>
+                    <a:p>
+                      <a:r>
+                        <a:rPr sz="1150" b="0">
+                          <a:latin typeface="Calibri"/>
+                        </a:rPr>
+                        <a:t>0.47</a:t>
+                      </a:r>
+                    </a:p>
+                  </a:txBody>
+                  <a:tcPr>
+                    <a:solidFill>
+                      <a:srgbClr val="FFFFFF"/>
+                    </a:solidFill>
+                  </a:tcPr>
+                </a:tc>
+                <a:tc>
+                  <a:txBody>
+                    <a:bodyPr/>
+                    <a:lstStyle/>
+                    <a:p>
+                      <a:r>
+                        <a:rPr sz="1150" b="0">
+                          <a:latin typeface="Calibri"/>
+                        </a:rPr>
+                        <a:t>18</a:t>
+                      </a:r>
+                    </a:p>
+                  </a:txBody>
+                  <a:tcPr>
+                    <a:solidFill>
+                      <a:srgbClr val="FFFFFF"/>
+                    </a:solidFill>
+                  </a:tcPr>
+                </a:tc>
+                <a:tc>
+                  <a:txBody>
+                    <a:bodyPr/>
+                    <a:lstStyle/>
+                    <a:p>
+                      <a:r>
+                        <a:rPr sz="1150" b="0">
+                          <a:latin typeface="Calibri"/>
+                        </a:rPr>
+                        <a:t>1305</a:t>
+                      </a:r>
+                    </a:p>
+                  </a:txBody>
+                  <a:tcPr>
+                    <a:solidFill>
+                      <a:srgbClr val="FFFFFF"/>
+                    </a:solidFill>
+                  </a:tcPr>
+                </a:tc>
+                <a:tc>
+                  <a:txBody>
+                    <a:bodyPr/>
+                    <a:lstStyle/>
+                    <a:p>
+                      <a:r>
+                        <a:rPr sz="1150" b="0">
+                          <a:latin typeface="Calibri"/>
+                        </a:rPr>
+                        <a:t>1330</a:t>
+                      </a:r>
+                    </a:p>
+                  </a:txBody>
+                  <a:tcPr>
+                    <a:solidFill>
+                      <a:srgbClr val="FFFFFF"/>
+                    </a:solidFill>
+                  </a:tcPr>
+                </a:tc>
+                <a:tc>
+                  <a:txBody>
+                    <a:bodyPr/>
+                    <a:lstStyle/>
+                    <a:p>
+                      <a:r>
+                        <a:rPr sz="1150" b="1">
+                          <a:solidFill>
+                            <a:srgbClr val="187A33"/>
+                          </a:solidFill>
+                          <a:latin typeface="Calibri"/>
+                        </a:rPr>
+                        <a:t>1.9%</a:t>
+                      </a:r>
+                    </a:p>
+                  </a:txBody>
+                  <a:tcPr>
+                    <a:solidFill>
+                      <a:srgbClr val="FFFFFF"/>
+                    </a:solidFill>
+                  </a:tcPr>
+                </a:tc>
+              </a:tr>
+              <a:tr h="402336">
+                <a:tc>
+                  <a:txBody>
+                    <a:bodyPr/>
+                    <a:lstStyle/>
+                    <a:p>
+                      <a:r>
+                        <a:rPr sz="1150" b="1">
+                          <a:latin typeface="Calibri"/>
+                        </a:rPr>
+                        <a:t>yuv 1080p — YUV420→RGB565</a:t>
+                      </a:r>
+                    </a:p>
+                  </a:txBody>
+                  <a:tcPr>
+                    <a:solidFill>
+                      <a:srgbClr val="EFF3F9"/>
+                    </a:solidFill>
+                  </a:tcPr>
+                </a:tc>
+                <a:tc>
+                  <a:txBody>
+                    <a:bodyPr/>
+                    <a:lstStyle/>
+                    <a:p>
+                      <a:r>
+                        <a:rPr sz="1150" b="0">
+                          <a:latin typeface="Calibri"/>
+                        </a:rPr>
+                        <a:t>0.22</a:t>
+                      </a:r>
+                    </a:p>
+                  </a:txBody>
+                  <a:tcPr>
+                    <a:solidFill>
+                      <a:srgbClr val="EFF3F9"/>
+                    </a:solidFill>
+                  </a:tcPr>
+                </a:tc>
+                <a:tc>
+                  <a:txBody>
+                    <a:bodyPr/>
+                    <a:lstStyle/>
+                    <a:p>
+                      <a:r>
+                        <a:rPr sz="1150" b="0">
+                          <a:latin typeface="Calibri"/>
+                        </a:rPr>
+                        <a:t>855</a:t>
+                      </a:r>
+                    </a:p>
+                  </a:txBody>
+                  <a:tcPr>
+                    <a:solidFill>
+                      <a:srgbClr val="EFF3F9"/>
+                    </a:solidFill>
+                  </a:tcPr>
+                </a:tc>
+                <a:tc>
+                  <a:txBody>
+                    <a:bodyPr/>
+                    <a:lstStyle/>
+                    <a:p>
+                      <a:r>
+                        <a:rPr sz="1150" b="0">
+                          <a:latin typeface="Calibri"/>
+                        </a:rPr>
+                        <a:t>1393</a:t>
+                      </a:r>
+                    </a:p>
+                  </a:txBody>
+                  <a:tcPr>
+                    <a:solidFill>
+                      <a:srgbClr val="EFF3F9"/>
+                    </a:solidFill>
+                  </a:tcPr>
+                </a:tc>
+                <a:tc>
+                  <a:txBody>
+                    <a:bodyPr/>
+                    <a:lstStyle/>
+                    <a:p>
+                      <a:r>
+                        <a:rPr sz="1150" b="0">
+                          <a:latin typeface="Calibri"/>
+                        </a:rPr>
+                        <a:t>1456</a:t>
+                      </a:r>
+                    </a:p>
+                  </a:txBody>
+                  <a:tcPr>
+                    <a:solidFill>
+                      <a:srgbClr val="EFF3F9"/>
+                    </a:solidFill>
+                  </a:tcPr>
+                </a:tc>
+                <a:tc>
+                  <a:txBody>
+                    <a:bodyPr/>
+                    <a:lstStyle/>
+                    <a:p>
+                      <a:r>
+                        <a:rPr sz="1150" b="1">
+                          <a:solidFill>
+                            <a:srgbClr val="187A33"/>
+                          </a:solidFill>
+                          <a:latin typeface="Calibri"/>
+                        </a:rPr>
+                        <a:t>4.3%</a:t>
+                      </a:r>
+                    </a:p>
+                  </a:txBody>
+                  <a:tcPr>
+                    <a:solidFill>
+                      <a:srgbClr val="EFF3F9"/>
+                    </a:solidFill>
+                  </a:tcPr>
+                </a:tc>
+              </a:tr>
+            </a:tbl>
+          </a:graphicData>
+        </a:graphic>
+      </p:graphicFrame>
+      <p:sp>
+        <p:nvSpPr>
+          <p:cNvPr id="11" name="Rounded Rectangle 10"/>
+          <p:cNvSpPr/>
+          <p:nvPr/>
+        </p:nvSpPr>
+        <p:spPr>
+          <a:xfrm>
+            <a:off x="548640" y="4663440"/>
+            <a:ext cx="11064240" cy="1316736"/>
+          </a:xfrm>
+          <a:prstGeom prst="roundRect">
+            <a:avLst/>
+          </a:prstGeom>
+          <a:solidFill>
+            <a:srgbClr val="FDF6EC"/>
+          </a:solidFill>
+          <a:ln>
+            <a:solidFill>
+              <a:srgbClr val="B06000"/>
+            </a:solidFill>
+          </a:ln>
+        </p:spPr>
+        <p:style>
+          <a:lnRef idx="1">
+            <a:schemeClr val="accent1"/>
+          </a:lnRef>
+          <a:fillRef idx="3">
+            <a:schemeClr val="accent1"/>
+          </a:fillRef>
+          <a:effectRef idx="2">
+            <a:schemeClr val="accent1"/>
+          </a:effectRef>
+          <a:fontRef idx="minor">
+            <a:schemeClr val="lt1"/>
+          </a:fontRef>
+        </p:style>
+        <p:txBody>
+          <a:bodyPr rtlCol="0" anchor="ctr"/>
+          <a:lstStyle/>
+          <a:p>
+            <a:pPr algn="ctr"/>
+          </a:p>
+        </p:txBody>
+      </p:sp>
+      <p:sp>
+        <p:nvSpPr>
+          <p:cNvPr id="12" name="TextBox 11"/>
+          <p:cNvSpPr txBox="1"/>
+          <p:nvPr/>
+        </p:nvSpPr>
+        <p:spPr>
+          <a:xfrm>
+            <a:off x="822960" y="4773168"/>
+            <a:ext cx="10515600" cy="1133856"/>
+          </a:xfrm>
+          <a:prstGeom prst="rect">
+            <a:avLst/>
+          </a:prstGeom>
+          <a:noFill/>
+        </p:spPr>
+        <p:txBody>
+          <a:bodyPr wrap="square">
+            <a:spAutoFit/>
+          </a:bodyPr>
+          <a:lstStyle/>
+          <a:p>
+            <a:pPr algn="l"/>
+            <a:r>
+              <a:rPr sz="1200" b="0">
+                <a:solidFill>
+                  <a:srgbClr val="202124"/>
+                </a:solidFill>
+                <a:latin typeface="Verdana"/>
+              </a:rPr>
+              <a:t>And it found the model's edge. A pure READ stream at 5.5 GB/s predicts to 1.3%. A 50/50 read+write stream at 11 GB/s over-predicts by 12–13%. The model carries ONE bandwidth term, so a byte written and a byte read are charged the same power — and a written byte evidently costs less. Nothing in the 50-app corpus was write-heavy enough to expose that.</a:t>
+            </a:r>
+          </a:p>
+        </p:txBody>
+      </p:sp>
+      <p:sp>
+        <p:nvSpPr>
+          <p:cNvPr id="13" name="TextBox 12"/>
+          <p:cNvSpPr txBox="1"/>
+          <p:nvPr/>
+        </p:nvSpPr>
+        <p:spPr>
+          <a:xfrm>
+            <a:off x="548640" y="6108192"/>
+            <a:ext cx="11064240" cy="310896"/>
+          </a:xfrm>
+          <a:prstGeom prst="rect">
+            <a:avLst/>
+          </a:prstGeom>
+          <a:noFill/>
+        </p:spPr>
+        <p:txBody>
+          <a:bodyPr wrap="square">
+            <a:spAutoFit/>
+          </a:bodyPr>
+          <a:lstStyle/>
+          <a:p>
+            <a:pPr algn="l"/>
+            <a:r>
+              <a:rPr sz="1100" b="1">
+                <a:solidFill>
+                  <a:srgbClr val="1F5CA8"/>
+                </a:solidFill>
+                <a:latin typeface="Verdana"/>
+              </a:rPr>
+              <a:t>Two guesses that were wrong, and worth knowing: YUV→RGB frame conversion is compute-bound (1.4 IPC), and sparse gather is latency-bound, not bandwidth-bound.</a:t>
             </a:r>
           </a:p>
         </p:txBody>
@@ -13783,602 +14980,6 @@
       </p:sp>
       <p:sp>
         <p:nvSpPr>
-          <p:cNvPr id="9" name="TextBox 8"/>
-          <p:cNvSpPr txBox="1"/>
-          <p:nvPr/>
-        </p:nvSpPr>
-        <p:spPr>
-          <a:xfrm>
-            <a:off x="822960" y="1572768"/>
-            <a:ext cx="10607040" cy="420624"/>
-          </a:xfrm>
-          <a:prstGeom prst="rect">
-            <a:avLst/>
-          </a:prstGeom>
-          <a:noFill/>
-        </p:spPr>
-        <p:txBody>
-          <a:bodyPr wrap="square">
-            <a:spAutoFit/>
-          </a:bodyPr>
-          <a:lstStyle/>
-          <a:p>
-            <a:pPr algn="l"/>
-            <a:r>
-              <a:rPr sz="1700" b="1">
-                <a:solidFill>
-                  <a:srgbClr val="FFFFFF"/>
-                </a:solidFill>
-                <a:latin typeface="Calibri"/>
-              </a:rPr>
-              <a:t>QEMU over-reports DRAM bandwidth by roughly 2x — the one place it does not match the silicon.</a:t>
-            </a:r>
-          </a:p>
-        </p:txBody>
-      </p:sp>
-      <p:graphicFrame>
-        <p:nvGraphicFramePr>
-          <p:cNvPr id="10" name="Table 9"/>
-          <p:cNvGraphicFramePr>
-            <a:graphicFrameLocks noGrp="1"/>
-          </p:cNvGraphicFramePr>
-          <p:nvPr/>
-        </p:nvGraphicFramePr>
-        <p:xfrm>
-          <a:off x="548640" y="2286000"/>
-          <a:ext cx="11064240" cy="1609344"/>
-        </p:xfrm>
-        <a:graphic>
-          <a:graphicData uri="http://schemas.openxmlformats.org/drawingml/2006/table">
-            <a:tbl>
-              <a:tblPr firstRow="1" bandRow="1">
-                <a:tableStyleId>{5C22544A-7EE6-4342-B048-85BDC9FD1C3A}</a:tableStyleId>
-              </a:tblPr>
-              <a:tblGrid>
-                <a:gridCol w="2194560">
-                  <a:extLst>
-                    <a:ext uri="{9D8B030D-6E8A-4147-A177-3AD203B41FA5}">
-                      <a16:colId xmlns:a16="http://schemas.microsoft.com/office/drawing/2014/main" val="20000"/>
-                    </a:ext>
-                  </a:extLst>
-                </a:gridCol>
-                <a:gridCol w="2103120">
-                  <a:extLst>
-                    <a:ext uri="{9D8B030D-6E8A-4147-A177-3AD203B41FA5}">
-                      <a16:colId xmlns:a16="http://schemas.microsoft.com/office/drawing/2014/main" val="20001"/>
-                    </a:ext>
-                  </a:extLst>
-                </a:gridCol>
-                <a:gridCol w="2286000">
-                  <a:extLst>
-                    <a:ext uri="{9D8B030D-6E8A-4147-A177-3AD203B41FA5}">
-                      <a16:colId xmlns:a16="http://schemas.microsoft.com/office/drawing/2014/main" val="20002"/>
-                    </a:ext>
-                  </a:extLst>
-                </a:gridCol>
-                <a:gridCol w="1828800">
-                  <a:extLst>
-                    <a:ext uri="{9D8B030D-6E8A-4147-A177-3AD203B41FA5}">
-                      <a16:colId xmlns:a16="http://schemas.microsoft.com/office/drawing/2014/main" val="20003"/>
-                    </a:ext>
-                  </a:extLst>
-                </a:gridCol>
-                <a:gridCol w="2651760">
-                  <a:extLst>
-                    <a:ext uri="{9D8B030D-6E8A-4147-A177-3AD203B41FA5}">
-                      <a16:colId xmlns:a16="http://schemas.microsoft.com/office/drawing/2014/main" val="20004"/>
-                    </a:ext>
-                  </a:extLst>
-                </a:gridCol>
-              </a:tblGrid>
-              <a:tr h="402336">
-                <a:tc>
-                  <a:txBody>
-                    <a:bodyPr/>
-                    <a:lstStyle/>
-                    <a:p>
-                      <a:r>
-                        <a:rPr sz="1200" b="1">
-                          <a:solidFill>
-                            <a:srgbClr val="FFFFFF"/>
-                          </a:solidFill>
-                          <a:latin typeface="Calibri"/>
-                        </a:rPr>
-                        <a:t>application</a:t>
-                      </a:r>
-                    </a:p>
-                  </a:txBody>
-                  <a:tcPr>
-                    <a:solidFill>
-                      <a:srgbClr val="202124"/>
-                    </a:solidFill>
-                  </a:tcPr>
-                </a:tc>
-                <a:tc>
-                  <a:txBody>
-                    <a:bodyPr/>
-                    <a:lstStyle/>
-                    <a:p>
-                      <a:r>
-                        <a:rPr sz="1200" b="1">
-                          <a:solidFill>
-                            <a:srgbClr val="FFFFFF"/>
-                          </a:solidFill>
-                          <a:latin typeface="Calibri"/>
-                        </a:rPr>
-                        <a:t>QEMU GB/s</a:t>
-                      </a:r>
-                    </a:p>
-                  </a:txBody>
-                  <a:tcPr>
-                    <a:solidFill>
-                      <a:srgbClr val="202124"/>
-                    </a:solidFill>
-                  </a:tcPr>
-                </a:tc>
-                <a:tc>
-                  <a:txBody>
-                    <a:bodyPr/>
-                    <a:lstStyle/>
-                    <a:p>
-                      <a:r>
-                        <a:rPr sz="1200" b="1">
-                          <a:solidFill>
-                            <a:srgbClr val="FFFFFF"/>
-                          </a:solidFill>
-                          <a:latin typeface="Calibri"/>
-                        </a:rPr>
-                        <a:t>silicon GB/s</a:t>
-                      </a:r>
-                    </a:p>
-                  </a:txBody>
-                  <a:tcPr>
-                    <a:solidFill>
-                      <a:srgbClr val="202124"/>
-                    </a:solidFill>
-                  </a:tcPr>
-                </a:tc>
-                <a:tc>
-                  <a:txBody>
-                    <a:bodyPr/>
-                    <a:lstStyle/>
-                    <a:p>
-                      <a:r>
-                        <a:rPr sz="1200" b="1">
-                          <a:solidFill>
-                            <a:srgbClr val="FFFFFF"/>
-                          </a:solidFill>
-                          <a:latin typeface="Calibri"/>
-                        </a:rPr>
-                        <a:t>error</a:t>
-                      </a:r>
-                    </a:p>
-                  </a:txBody>
-                  <a:tcPr>
-                    <a:solidFill>
-                      <a:srgbClr val="202124"/>
-                    </a:solidFill>
-                  </a:tcPr>
-                </a:tc>
-                <a:tc>
-                  <a:txBody>
-                    <a:bodyPr/>
-                    <a:lstStyle/>
-                    <a:p>
-                      <a:r>
-                        <a:rPr sz="1200" b="1">
-                          <a:solidFill>
-                            <a:srgbClr val="FFFFFF"/>
-                          </a:solidFill>
-                          <a:latin typeface="Calibri"/>
-                        </a:rPr>
-                        <a:t>core-rail impact</a:t>
-                      </a:r>
-                    </a:p>
-                  </a:txBody>
-                  <a:tcPr>
-                    <a:solidFill>
-                      <a:srgbClr val="202124"/>
-                    </a:solidFill>
-                  </a:tcPr>
-                </a:tc>
-                <a:extLst>
-                  <a:ext uri="{0D108BD9-81ED-4DB2-BD59-A6C34878D82A}">
-                    <a16:rowId xmlns:a16="http://schemas.microsoft.com/office/drawing/2014/main" val="10000"/>
-                  </a:ext>
-                </a:extLst>
-              </a:tr>
-              <a:tr h="402336">
-                <a:tc>
-                  <a:txBody>
-                    <a:bodyPr/>
-                    <a:lstStyle/>
-                    <a:p>
-                      <a:r>
-                        <a:rPr sz="1200" b="1">
-                          <a:latin typeface="Calibri"/>
-                        </a:rPr>
-                        <a:t>mem-w</a:t>
-                      </a:r>
-                    </a:p>
-                  </a:txBody>
-                  <a:tcPr>
-                    <a:solidFill>
-                      <a:srgbClr val="EFF3FA"/>
-                    </a:solidFill>
-                  </a:tcPr>
-                </a:tc>
-                <a:tc>
-                  <a:txBody>
-                    <a:bodyPr/>
-                    <a:lstStyle/>
-                    <a:p>
-                      <a:r>
-                        <a:rPr sz="1200" b="0">
-                          <a:latin typeface="Calibri"/>
-                        </a:rPr>
-                        <a:t>4.66</a:t>
-                      </a:r>
-                    </a:p>
-                  </a:txBody>
-                  <a:tcPr>
-                    <a:solidFill>
-                      <a:srgbClr val="EFF3FA"/>
-                    </a:solidFill>
-                  </a:tcPr>
-                </a:tc>
-                <a:tc>
-                  <a:txBody>
-                    <a:bodyPr/>
-                    <a:lstStyle/>
-                    <a:p>
-                      <a:r>
-                        <a:rPr sz="1200" b="0">
-                          <a:latin typeface="Calibri"/>
-                        </a:rPr>
-                        <a:t>2.62</a:t>
-                      </a:r>
-                    </a:p>
-                  </a:txBody>
-                  <a:tcPr>
-                    <a:solidFill>
-                      <a:srgbClr val="EFF3FA"/>
-                    </a:solidFill>
-                  </a:tcPr>
-                </a:tc>
-                <a:tc>
-                  <a:txBody>
-                    <a:bodyPr/>
-                    <a:lstStyle/>
-                    <a:p>
-                      <a:r>
-                        <a:rPr sz="1200" b="1">
-                          <a:solidFill>
-                            <a:srgbClr val="B31412"/>
-                          </a:solidFill>
-                          <a:latin typeface="Calibri"/>
-                        </a:rPr>
-                        <a:t>+78%</a:t>
-                      </a:r>
-                    </a:p>
-                  </a:txBody>
-                  <a:tcPr>
-                    <a:solidFill>
-                      <a:srgbClr val="EFF3FA"/>
-                    </a:solidFill>
-                  </a:tcPr>
-                </a:tc>
-                <a:tc>
-                  <a:txBody>
-                    <a:bodyPr/>
-                    <a:lstStyle/>
-                    <a:p>
-                      <a:r>
-                        <a:rPr sz="1200" b="0">
-                          <a:latin typeface="Calibri"/>
-                        </a:rPr>
-                        <a:t>124 mW</a:t>
-                      </a:r>
-                    </a:p>
-                  </a:txBody>
-                  <a:tcPr>
-                    <a:solidFill>
-                      <a:srgbClr val="EFF3FA"/>
-                    </a:solidFill>
-                  </a:tcPr>
-                </a:tc>
-                <a:extLst>
-                  <a:ext uri="{0D108BD9-81ED-4DB2-BD59-A6C34878D82A}">
-                    <a16:rowId xmlns:a16="http://schemas.microsoft.com/office/drawing/2014/main" val="10001"/>
-                  </a:ext>
-                </a:extLst>
-              </a:tr>
-              <a:tr h="402336">
-                <a:tc>
-                  <a:txBody>
-                    <a:bodyPr/>
-                    <a:lstStyle/>
-                    <a:p>
-                      <a:r>
-                        <a:rPr sz="1200" b="1">
-                          <a:latin typeface="Calibri"/>
-                        </a:rPr>
-                        <a:t>mem</a:t>
-                      </a:r>
-                    </a:p>
-                  </a:txBody>
-                  <a:tcPr>
-                    <a:solidFill>
-                      <a:srgbClr val="FFFFFF"/>
-                    </a:solidFill>
-                  </a:tcPr>
-                </a:tc>
-                <a:tc>
-                  <a:txBody>
-                    <a:bodyPr/>
-                    <a:lstStyle/>
-                    <a:p>
-                      <a:r>
-                        <a:rPr sz="1200" b="0">
-                          <a:latin typeface="Calibri"/>
-                        </a:rPr>
-                        <a:t>4.93</a:t>
-                      </a:r>
-                    </a:p>
-                  </a:txBody>
-                  <a:tcPr>
-                    <a:solidFill>
-                      <a:srgbClr val="FFFFFF"/>
-                    </a:solidFill>
-                  </a:tcPr>
-                </a:tc>
-                <a:tc>
-                  <a:txBody>
-                    <a:bodyPr/>
-                    <a:lstStyle/>
-                    <a:p>
-                      <a:r>
-                        <a:rPr sz="1200" b="0">
-                          <a:latin typeface="Calibri"/>
-                        </a:rPr>
-                        <a:t>2.53</a:t>
-                      </a:r>
-                    </a:p>
-                  </a:txBody>
-                  <a:tcPr>
-                    <a:solidFill>
-                      <a:srgbClr val="FFFFFF"/>
-                    </a:solidFill>
-                  </a:tcPr>
-                </a:tc>
-                <a:tc>
-                  <a:txBody>
-                    <a:bodyPr/>
-                    <a:lstStyle/>
-                    <a:p>
-                      <a:r>
-                        <a:rPr sz="1200" b="1">
-                          <a:solidFill>
-                            <a:srgbClr val="B31412"/>
-                          </a:solidFill>
-                          <a:latin typeface="Calibri"/>
-                        </a:rPr>
-                        <a:t>+95%</a:t>
-                      </a:r>
-                    </a:p>
-                  </a:txBody>
-                  <a:tcPr>
-                    <a:solidFill>
-                      <a:srgbClr val="FFFFFF"/>
-                    </a:solidFill>
-                  </a:tcPr>
-                </a:tc>
-                <a:tc>
-                  <a:txBody>
-                    <a:bodyPr/>
-                    <a:lstStyle/>
-                    <a:p>
-                      <a:r>
-                        <a:rPr sz="1200" b="0">
-                          <a:latin typeface="Calibri"/>
-                        </a:rPr>
-                        <a:t>145 mW</a:t>
-                      </a:r>
-                    </a:p>
-                  </a:txBody>
-                  <a:tcPr>
-                    <a:solidFill>
-                      <a:srgbClr val="FFFFFF"/>
-                    </a:solidFill>
-                  </a:tcPr>
-                </a:tc>
-                <a:extLst>
-                  <a:ext uri="{0D108BD9-81ED-4DB2-BD59-A6C34878D82A}">
-                    <a16:rowId xmlns:a16="http://schemas.microsoft.com/office/drawing/2014/main" val="10002"/>
-                  </a:ext>
-                </a:extLst>
-              </a:tr>
-              <a:tr h="402336">
-                <a:tc>
-                  <a:txBody>
-                    <a:bodyPr/>
-                    <a:lstStyle/>
-                    <a:p>
-                      <a:r>
-                        <a:rPr sz="1200" b="1">
-                          <a:latin typeface="Calibri"/>
-                        </a:rPr>
-                        <a:t>mm-big</a:t>
-                      </a:r>
-                    </a:p>
-                  </a:txBody>
-                  <a:tcPr>
-                    <a:solidFill>
-                      <a:srgbClr val="EFF3FA"/>
-                    </a:solidFill>
-                  </a:tcPr>
-                </a:tc>
-                <a:tc>
-                  <a:txBody>
-                    <a:bodyPr/>
-                    <a:lstStyle/>
-                    <a:p>
-                      <a:r>
-                        <a:rPr sz="1200" b="0">
-                          <a:latin typeface="Calibri"/>
-                        </a:rPr>
-                        <a:t>1.49</a:t>
-                      </a:r>
-                    </a:p>
-                  </a:txBody>
-                  <a:tcPr>
-                    <a:solidFill>
-                      <a:srgbClr val="EFF3FA"/>
-                    </a:solidFill>
-                  </a:tcPr>
-                </a:tc>
-                <a:tc>
-                  <a:txBody>
-                    <a:bodyPr/>
-                    <a:lstStyle/>
-                    <a:p>
-                      <a:r>
-                        <a:rPr sz="1200" b="0">
-                          <a:latin typeface="Calibri"/>
-                        </a:rPr>
-                        <a:t>0.60</a:t>
-                      </a:r>
-                    </a:p>
-                  </a:txBody>
-                  <a:tcPr>
-                    <a:solidFill>
-                      <a:srgbClr val="EFF3FA"/>
-                    </a:solidFill>
-                  </a:tcPr>
-                </a:tc>
-                <a:tc>
-                  <a:txBody>
-                    <a:bodyPr/>
-                    <a:lstStyle/>
-                    <a:p>
-                      <a:r>
-                        <a:rPr sz="1200" b="1">
-                          <a:solidFill>
-                            <a:srgbClr val="B31412"/>
-                          </a:solidFill>
-                          <a:latin typeface="Calibri"/>
-                        </a:rPr>
-                        <a:t>+149%</a:t>
-                      </a:r>
-                    </a:p>
-                  </a:txBody>
-                  <a:tcPr>
-                    <a:solidFill>
-                      <a:srgbClr val="EFF3FA"/>
-                    </a:solidFill>
-                  </a:tcPr>
-                </a:tc>
-                <a:tc>
-                  <a:txBody>
-                    <a:bodyPr/>
-                    <a:lstStyle/>
-                    <a:p>
-                      <a:r>
-                        <a:rPr sz="1200" b="0">
-                          <a:latin typeface="Calibri"/>
-                        </a:rPr>
-                        <a:t>54 mW</a:t>
-                      </a:r>
-                    </a:p>
-                  </a:txBody>
-                  <a:tcPr>
-                    <a:solidFill>
-                      <a:srgbClr val="EFF3FA"/>
-                    </a:solidFill>
-                  </a:tcPr>
-                </a:tc>
-                <a:extLst>
-                  <a:ext uri="{0D108BD9-81ED-4DB2-BD59-A6C34878D82A}">
-                    <a16:rowId xmlns:a16="http://schemas.microsoft.com/office/drawing/2014/main" val="10003"/>
-                  </a:ext>
-                </a:extLst>
-              </a:tr>
-            </a:tbl>
-          </a:graphicData>
-        </a:graphic>
-      </p:graphicFrame>
-      <p:sp>
-        <p:nvSpPr>
-          <p:cNvPr id="11" name="TextBox 10"/>
-          <p:cNvSpPr txBox="1"/>
-          <p:nvPr/>
-        </p:nvSpPr>
-        <p:spPr>
-          <a:xfrm>
-            <a:off x="548640" y="3931920"/>
-            <a:ext cx="11064240" cy="369332"/>
-          </a:xfrm>
-          <a:prstGeom prst="rect">
-            <a:avLst/>
-          </a:prstGeom>
-          <a:noFill/>
-        </p:spPr>
-        <p:txBody>
-          <a:bodyPr wrap="square">
-            <a:spAutoFit/>
-          </a:bodyPr>
-          <a:lstStyle/>
-          <a:p>
-            <a:pPr algn="l"/>
-            <a:r>
-              <a:rPr b="1">
-                <a:solidFill>
-                  <a:srgbClr val="202124"/>
-                </a:solidFill>
-                <a:latin typeface="Calibri"/>
-              </a:rPr>
-              <a:t>Those are the only 3 applications of 50 that exceed 0.5 GB/s.</a:t>
-            </a:r>
-          </a:p>
-        </p:txBody>
-      </p:sp>
-      <p:sp>
-        <p:nvSpPr>
-          <p:cNvPr id="12" name="TextBox 11"/>
-          <p:cNvSpPr txBox="1"/>
-          <p:nvPr/>
-        </p:nvSpPr>
-        <p:spPr>
-          <a:xfrm>
-            <a:off x="548640" y="4315968"/>
-            <a:ext cx="11064240" cy="830997"/>
-          </a:xfrm>
-          <a:prstGeom prst="rect">
-            <a:avLst/>
-          </a:prstGeom>
-          <a:noFill/>
-        </p:spPr>
-        <p:txBody>
-          <a:bodyPr wrap="square">
-            <a:spAutoFit/>
-          </a:bodyPr>
-          <a:lstStyle/>
-          <a:p>
-            <a:pPr algn="l"/>
-            <a:r>
-              <a:rPr sz="1600" b="0">
-                <a:solidFill>
-                  <a:srgbClr val="5F6368"/>
-                </a:solidFill>
-                <a:latin typeface="Calibri"/>
-              </a:rPr>
-              <a:t>The cause is write streaming: the A55 skips read-for-ownership on a full cache-line write, so the line is never fetched from DRAM. QEMU's cache model allocates it anyway and counts a transaction the silicon never issued. It is a known, single-mechanism gap — not noise — and it is the one piece of upstream work this campaign produced.</a:t>
-            </a:r>
-          </a:p>
-        </p:txBody>
-      </p:sp>
-      <p:sp>
-        <p:nvSpPr>
           <p:cNvPr id="13" name="Rounded Rectangle 12"/>
           <p:cNvSpPr/>
           <p:nvPr/>
@@ -14425,14 +15026,57 @@
       </p:sp>
       <p:sp>
         <p:nvSpPr>
-          <p:cNvPr id="14" name="TextBox 13"/>
+          <p:cNvPr id="14" name="Rectangle 13"/>
+          <p:cNvSpPr/>
+          <p:nvPr/>
+        </p:nvSpPr>
+        <p:spPr>
+          <a:xfrm>
+            <a:off x="548640" y="1481328"/>
+            <a:ext cx="11064240" cy="548640"/>
+          </a:xfrm>
+          <a:prstGeom prst="rect">
+            <a:avLst/>
+          </a:prstGeom>
+          <a:solidFill>
+            <a:srgbClr val="187A33"/>
+          </a:solidFill>
+          <a:ln>
+            <a:noFill/>
+          </a:ln>
+        </p:spPr>
+        <p:style>
+          <a:lnRef idx="1">
+            <a:schemeClr val="accent1"/>
+          </a:lnRef>
+          <a:fillRef idx="3">
+            <a:schemeClr val="accent1"/>
+          </a:fillRef>
+          <a:effectRef idx="2">
+            <a:schemeClr val="accent1"/>
+          </a:effectRef>
+          <a:fontRef idx="minor">
+            <a:schemeClr val="lt1"/>
+          </a:fontRef>
+        </p:style>
+        <p:txBody>
+          <a:bodyPr rtlCol="0" anchor="ctr"/>
+          <a:lstStyle/>
+          <a:p>
+            <a:pPr algn="ctr"/>
+          </a:p>
+        </p:txBody>
+      </p:sp>
+      <p:sp>
+        <p:nvSpPr>
+          <p:cNvPr id="15" name="TextBox 14"/>
           <p:cNvSpPr txBox="1"/>
           <p:nvPr/>
         </p:nvSpPr>
         <p:spPr>
           <a:xfrm>
-            <a:off x="822960" y="5468112"/>
-            <a:ext cx="10515600" cy="830997"/>
+            <a:off x="822960" y="1554480"/>
+            <a:ext cx="10607040" cy="420624"/>
           </a:xfrm>
           <a:prstGeom prst="rect">
             <a:avLst/>
@@ -14445,51 +15089,1082 @@
           </a:bodyPr>
           <a:lstStyle/>
           <a:p>
+            <a:pPr algn="l"/>
+            <a:r>
+              <a:rPr sz="1700" b="1">
+                <a:solidFill>
+                  <a:srgbClr val="FFFFFF"/>
+                </a:solidFill>
+                <a:latin typeface="Verdana"/>
+              </a:rPr>
+              <a:t>Compared like for like, QEMU's DRAM read traffic tracks the silicon.</a:t>
+            </a:r>
+          </a:p>
+        </p:txBody>
+      </p:sp>
+      <p:graphicFrame>
+        <p:nvGraphicFramePr>
+          <p:cNvPr id="16" name="Table 15"/>
+          <p:cNvGraphicFramePr>
+            <a:graphicFrameLocks noGrp="1"/>
+          </p:cNvGraphicFramePr>
+          <p:nvPr/>
+        </p:nvGraphicFramePr>
+        <p:xfrm>
+          <a:off x="548640" y="2194560"/>
+          <a:ext cx="6035040" cy="3291840"/>
+        </p:xfrm>
+        <a:graphic>
+          <a:graphicData uri="http://schemas.openxmlformats.org/drawingml/2006/table">
+            <a:tbl>
+              <a:tblPr firstRow="1" bandRow="1">
+                <a:tableStyleId>{5C22544A-7EE6-4342-B048-85BDC9FD1C3A}</a:tableStyleId>
+              </a:tblPr>
+              <a:tblGrid>
+                <a:gridCol w="1737360"/>
+                <a:gridCol w="1463040"/>
+                <a:gridCol w="1463040"/>
+                <a:gridCol w="1371600"/>
+              </a:tblGrid>
+              <a:tr h="329184">
+                <a:tc>
+                  <a:txBody>
+                    <a:bodyPr/>
+                    <a:lstStyle/>
+                    <a:p>
+                      <a:r>
+                        <a:rPr sz="1100" b="1">
+                          <a:solidFill>
+                            <a:srgbClr val="FFFFFF"/>
+                          </a:solidFill>
+                          <a:latin typeface="Calibri"/>
+                        </a:rPr>
+                        <a:t>application</a:t>
+                      </a:r>
+                    </a:p>
+                  </a:txBody>
+                  <a:tcPr>
+                    <a:solidFill>
+                      <a:srgbClr val="202124"/>
+                    </a:solidFill>
+                  </a:tcPr>
+                </a:tc>
+                <a:tc>
+                  <a:txBody>
+                    <a:bodyPr/>
+                    <a:lstStyle/>
+                    <a:p>
+                      <a:r>
+                        <a:rPr sz="1100" b="1">
+                          <a:solidFill>
+                            <a:srgbClr val="FFFFFF"/>
+                          </a:solidFill>
+                          <a:latin typeface="Calibri"/>
+                        </a:rPr>
+                        <a:t>QEMU reads</a:t>
+                      </a:r>
+                    </a:p>
+                  </a:txBody>
+                  <a:tcPr>
+                    <a:solidFill>
+                      <a:srgbClr val="202124"/>
+                    </a:solidFill>
+                  </a:tcPr>
+                </a:tc>
+                <a:tc>
+                  <a:txBody>
+                    <a:bodyPr/>
+                    <a:lstStyle/>
+                    <a:p>
+                      <a:r>
+                        <a:rPr sz="1100" b="1">
+                          <a:solidFill>
+                            <a:srgbClr val="FFFFFF"/>
+                          </a:solidFill>
+                          <a:latin typeface="Calibri"/>
+                        </a:rPr>
+                        <a:t>silicon reads</a:t>
+                      </a:r>
+                    </a:p>
+                  </a:txBody>
+                  <a:tcPr>
+                    <a:solidFill>
+                      <a:srgbClr val="202124"/>
+                    </a:solidFill>
+                  </a:tcPr>
+                </a:tc>
+                <a:tc>
+                  <a:txBody>
+                    <a:bodyPr/>
+                    <a:lstStyle/>
+                    <a:p>
+                      <a:r>
+                        <a:rPr sz="1100" b="1">
+                          <a:solidFill>
+                            <a:srgbClr val="FFFFFF"/>
+                          </a:solidFill>
+                          <a:latin typeface="Calibri"/>
+                        </a:rPr>
+                        <a:t>error</a:t>
+                      </a:r>
+                    </a:p>
+                  </a:txBody>
+                  <a:tcPr>
+                    <a:solidFill>
+                      <a:srgbClr val="202124"/>
+                    </a:solidFill>
+                  </a:tcPr>
+                </a:tc>
+              </a:tr>
+              <a:tr h="329184">
+                <a:tc>
+                  <a:txBody>
+                    <a:bodyPr/>
+                    <a:lstStyle/>
+                    <a:p>
+                      <a:r>
+                        <a:rPr sz="1100" b="1">
+                          <a:latin typeface="Calibri"/>
+                        </a:rPr>
+                        <a:t>mem-w</a:t>
+                      </a:r>
+                    </a:p>
+                  </a:txBody>
+                  <a:tcPr>
+                    <a:solidFill>
+                      <a:srgbClr val="EFF3F9"/>
+                    </a:solidFill>
+                  </a:tcPr>
+                </a:tc>
+                <a:tc>
+                  <a:txBody>
+                    <a:bodyPr/>
+                    <a:lstStyle/>
+                    <a:p>
+                      <a:r>
+                        <a:rPr sz="1100" b="0">
+                          <a:latin typeface="Calibri"/>
+                        </a:rPr>
+                        <a:t>2.33</a:t>
+                      </a:r>
+                    </a:p>
+                  </a:txBody>
+                  <a:tcPr>
+                    <a:solidFill>
+                      <a:srgbClr val="EFF3F9"/>
+                    </a:solidFill>
+                  </a:tcPr>
+                </a:tc>
+                <a:tc>
+                  <a:txBody>
+                    <a:bodyPr/>
+                    <a:lstStyle/>
+                    <a:p>
+                      <a:r>
+                        <a:rPr sz="1100" b="0">
+                          <a:latin typeface="Calibri"/>
+                        </a:rPr>
+                        <a:t>2.62</a:t>
+                      </a:r>
+                    </a:p>
+                  </a:txBody>
+                  <a:tcPr>
+                    <a:solidFill>
+                      <a:srgbClr val="EFF3F9"/>
+                    </a:solidFill>
+                  </a:tcPr>
+                </a:tc>
+                <a:tc>
+                  <a:txBody>
+                    <a:bodyPr/>
+                    <a:lstStyle/>
+                    <a:p>
+                      <a:r>
+                        <a:rPr sz="1100" b="1">
+                          <a:solidFill>
+                            <a:srgbClr val="187A33"/>
+                          </a:solidFill>
+                          <a:latin typeface="Calibri"/>
+                        </a:rPr>
+                        <a:t>-11%</a:t>
+                      </a:r>
+                    </a:p>
+                  </a:txBody>
+                  <a:tcPr>
+                    <a:solidFill>
+                      <a:srgbClr val="EFF3F9"/>
+                    </a:solidFill>
+                  </a:tcPr>
+                </a:tc>
+              </a:tr>
+              <a:tr h="329184">
+                <a:tc>
+                  <a:txBody>
+                    <a:bodyPr/>
+                    <a:lstStyle/>
+                    <a:p>
+                      <a:r>
+                        <a:rPr sz="1100" b="1">
+                          <a:latin typeface="Calibri"/>
+                        </a:rPr>
+                        <a:t>mem</a:t>
+                      </a:r>
+                    </a:p>
+                  </a:txBody>
+                  <a:tcPr>
+                    <a:solidFill>
+                      <a:srgbClr val="FFFFFF"/>
+                    </a:solidFill>
+                  </a:tcPr>
+                </a:tc>
+                <a:tc>
+                  <a:txBody>
+                    <a:bodyPr/>
+                    <a:lstStyle/>
+                    <a:p>
+                      <a:r>
+                        <a:rPr sz="1100" b="0">
+                          <a:latin typeface="Calibri"/>
+                        </a:rPr>
+                        <a:t>2.47</a:t>
+                      </a:r>
+                    </a:p>
+                  </a:txBody>
+                  <a:tcPr>
+                    <a:solidFill>
+                      <a:srgbClr val="FFFFFF"/>
+                    </a:solidFill>
+                  </a:tcPr>
+                </a:tc>
+                <a:tc>
+                  <a:txBody>
+                    <a:bodyPr/>
+                    <a:lstStyle/>
+                    <a:p>
+                      <a:r>
+                        <a:rPr sz="1100" b="0">
+                          <a:latin typeface="Calibri"/>
+                        </a:rPr>
+                        <a:t>2.53</a:t>
+                      </a:r>
+                    </a:p>
+                  </a:txBody>
+                  <a:tcPr>
+                    <a:solidFill>
+                      <a:srgbClr val="FFFFFF"/>
+                    </a:solidFill>
+                  </a:tcPr>
+                </a:tc>
+                <a:tc>
+                  <a:txBody>
+                    <a:bodyPr/>
+                    <a:lstStyle/>
+                    <a:p>
+                      <a:r>
+                        <a:rPr sz="1100" b="1">
+                          <a:solidFill>
+                            <a:srgbClr val="187A33"/>
+                          </a:solidFill>
+                          <a:latin typeface="Calibri"/>
+                        </a:rPr>
+                        <a:t>-2%</a:t>
+                      </a:r>
+                    </a:p>
+                  </a:txBody>
+                  <a:tcPr>
+                    <a:solidFill>
+                      <a:srgbClr val="FFFFFF"/>
+                    </a:solidFill>
+                  </a:tcPr>
+                </a:tc>
+              </a:tr>
+              <a:tr h="329184">
+                <a:tc>
+                  <a:txBody>
+                    <a:bodyPr/>
+                    <a:lstStyle/>
+                    <a:p>
+                      <a:r>
+                        <a:rPr sz="1100" b="1">
+                          <a:latin typeface="Calibri"/>
+                        </a:rPr>
+                        <a:t>mm-big</a:t>
+                      </a:r>
+                    </a:p>
+                  </a:txBody>
+                  <a:tcPr>
+                    <a:solidFill>
+                      <a:srgbClr val="EFF3F9"/>
+                    </a:solidFill>
+                  </a:tcPr>
+                </a:tc>
+                <a:tc>
+                  <a:txBody>
+                    <a:bodyPr/>
+                    <a:lstStyle/>
+                    <a:p>
+                      <a:r>
+                        <a:rPr sz="1100" b="0">
+                          <a:latin typeface="Calibri"/>
+                        </a:rPr>
+                        <a:t>1.49</a:t>
+                      </a:r>
+                    </a:p>
+                  </a:txBody>
+                  <a:tcPr>
+                    <a:solidFill>
+                      <a:srgbClr val="EFF3F9"/>
+                    </a:solidFill>
+                  </a:tcPr>
+                </a:tc>
+                <a:tc>
+                  <a:txBody>
+                    <a:bodyPr/>
+                    <a:lstStyle/>
+                    <a:p>
+                      <a:r>
+                        <a:rPr sz="1100" b="0">
+                          <a:latin typeface="Calibri"/>
+                        </a:rPr>
+                        <a:t>0.60</a:t>
+                      </a:r>
+                    </a:p>
+                  </a:txBody>
+                  <a:tcPr>
+                    <a:solidFill>
+                      <a:srgbClr val="EFF3F9"/>
+                    </a:solidFill>
+                  </a:tcPr>
+                </a:tc>
+                <a:tc>
+                  <a:txBody>
+                    <a:bodyPr/>
+                    <a:lstStyle/>
+                    <a:p>
+                      <a:r>
+                        <a:rPr sz="1100" b="1">
+                          <a:solidFill>
+                            <a:srgbClr val="B31412"/>
+                          </a:solidFill>
+                          <a:latin typeface="Calibri"/>
+                        </a:rPr>
+                        <a:t>+149%</a:t>
+                      </a:r>
+                    </a:p>
+                  </a:txBody>
+                  <a:tcPr>
+                    <a:solidFill>
+                      <a:srgbClr val="EFF3F9"/>
+                    </a:solidFill>
+                  </a:tcPr>
+                </a:tc>
+              </a:tr>
+              <a:tr h="329184">
+                <a:tc>
+                  <a:txBody>
+                    <a:bodyPr/>
+                    <a:lstStyle/>
+                    <a:p>
+                      <a:r>
+                        <a:rPr sz="1100" b="1">
+                          <a:latin typeface="Calibri"/>
+                        </a:rPr>
+                        <a:t>chase-big</a:t>
+                      </a:r>
+                    </a:p>
+                  </a:txBody>
+                  <a:tcPr>
+                    <a:solidFill>
+                      <a:srgbClr val="FFFFFF"/>
+                    </a:solidFill>
+                  </a:tcPr>
+                </a:tc>
+                <a:tc>
+                  <a:txBody>
+                    <a:bodyPr/>
+                    <a:lstStyle/>
+                    <a:p>
+                      <a:r>
+                        <a:rPr sz="1100" b="0">
+                          <a:latin typeface="Calibri"/>
+                        </a:rPr>
+                        <a:t>0.45</a:t>
+                      </a:r>
+                    </a:p>
+                  </a:txBody>
+                  <a:tcPr>
+                    <a:solidFill>
+                      <a:srgbClr val="FFFFFF"/>
+                    </a:solidFill>
+                  </a:tcPr>
+                </a:tc>
+                <a:tc>
+                  <a:txBody>
+                    <a:bodyPr/>
+                    <a:lstStyle/>
+                    <a:p>
+                      <a:r>
+                        <a:rPr sz="1100" b="0">
+                          <a:latin typeface="Calibri"/>
+                        </a:rPr>
+                        <a:t>0.45</a:t>
+                      </a:r>
+                    </a:p>
+                  </a:txBody>
+                  <a:tcPr>
+                    <a:solidFill>
+                      <a:srgbClr val="FFFFFF"/>
+                    </a:solidFill>
+                  </a:tcPr>
+                </a:tc>
+                <a:tc>
+                  <a:txBody>
+                    <a:bodyPr/>
+                    <a:lstStyle/>
+                    <a:p>
+                      <a:r>
+                        <a:rPr sz="1100" b="1">
+                          <a:solidFill>
+                            <a:srgbClr val="187A33"/>
+                          </a:solidFill>
+                          <a:latin typeface="Calibri"/>
+                        </a:rPr>
+                        <a:t>-1%</a:t>
+                      </a:r>
+                    </a:p>
+                  </a:txBody>
+                  <a:tcPr>
+                    <a:solidFill>
+                      <a:srgbClr val="FFFFFF"/>
+                    </a:solidFill>
+                  </a:tcPr>
+                </a:tc>
+              </a:tr>
+              <a:tr h="329184">
+                <a:tc>
+                  <a:txBody>
+                    <a:bodyPr/>
+                    <a:lstStyle/>
+                    <a:p>
+                      <a:r>
+                        <a:rPr sz="1100" b="1">
+                          <a:latin typeface="Calibri"/>
+                        </a:rPr>
+                        <a:t>chase</a:t>
+                      </a:r>
+                    </a:p>
+                  </a:txBody>
+                  <a:tcPr>
+                    <a:solidFill>
+                      <a:srgbClr val="EFF3F9"/>
+                    </a:solidFill>
+                  </a:tcPr>
+                </a:tc>
+                <a:tc>
+                  <a:txBody>
+                    <a:bodyPr/>
+                    <a:lstStyle/>
+                    <a:p>
+                      <a:r>
+                        <a:rPr sz="1100" b="0">
+                          <a:latin typeface="Calibri"/>
+                        </a:rPr>
+                        <a:t>0.45</a:t>
+                      </a:r>
+                    </a:p>
+                  </a:txBody>
+                  <a:tcPr>
+                    <a:solidFill>
+                      <a:srgbClr val="EFF3F9"/>
+                    </a:solidFill>
+                  </a:tcPr>
+                </a:tc>
+                <a:tc>
+                  <a:txBody>
+                    <a:bodyPr/>
+                    <a:lstStyle/>
+                    <a:p>
+                      <a:r>
+                        <a:rPr sz="1100" b="0">
+                          <a:latin typeface="Calibri"/>
+                        </a:rPr>
+                        <a:t>0.45</a:t>
+                      </a:r>
+                    </a:p>
+                  </a:txBody>
+                  <a:tcPr>
+                    <a:solidFill>
+                      <a:srgbClr val="EFF3F9"/>
+                    </a:solidFill>
+                  </a:tcPr>
+                </a:tc>
+                <a:tc>
+                  <a:txBody>
+                    <a:bodyPr/>
+                    <a:lstStyle/>
+                    <a:p>
+                      <a:r>
+                        <a:rPr sz="1100" b="1">
+                          <a:solidFill>
+                            <a:srgbClr val="187A33"/>
+                          </a:solidFill>
+                          <a:latin typeface="Calibri"/>
+                        </a:rPr>
+                        <a:t>-1%</a:t>
+                      </a:r>
+                    </a:p>
+                  </a:txBody>
+                  <a:tcPr>
+                    <a:solidFill>
+                      <a:srgbClr val="EFF3F9"/>
+                    </a:solidFill>
+                  </a:tcPr>
+                </a:tc>
+              </a:tr>
+              <a:tr h="329184">
+                <a:tc>
+                  <a:txBody>
+                    <a:bodyPr/>
+                    <a:lstStyle/>
+                    <a:p>
+                      <a:r>
+                        <a:rPr sz="1100" b="1">
+                          <a:latin typeface="Calibri"/>
+                        </a:rPr>
+                        <a:t>mm</a:t>
+                      </a:r>
+                    </a:p>
+                  </a:txBody>
+                  <a:tcPr>
+                    <a:solidFill>
+                      <a:srgbClr val="FFFFFF"/>
+                    </a:solidFill>
+                  </a:tcPr>
+                </a:tc>
+                <a:tc>
+                  <a:txBody>
+                    <a:bodyPr/>
+                    <a:lstStyle/>
+                    <a:p>
+                      <a:r>
+                        <a:rPr sz="1100" b="0">
+                          <a:latin typeface="Calibri"/>
+                        </a:rPr>
+                        <a:t>0.20</a:t>
+                      </a:r>
+                    </a:p>
+                  </a:txBody>
+                  <a:tcPr>
+                    <a:solidFill>
+                      <a:srgbClr val="FFFFFF"/>
+                    </a:solidFill>
+                  </a:tcPr>
+                </a:tc>
+                <a:tc>
+                  <a:txBody>
+                    <a:bodyPr/>
+                    <a:lstStyle/>
+                    <a:p>
+                      <a:r>
+                        <a:rPr sz="1100" b="0">
+                          <a:latin typeface="Calibri"/>
+                        </a:rPr>
+                        <a:t>0.32</a:t>
+                      </a:r>
+                    </a:p>
+                  </a:txBody>
+                  <a:tcPr>
+                    <a:solidFill>
+                      <a:srgbClr val="FFFFFF"/>
+                    </a:solidFill>
+                  </a:tcPr>
+                </a:tc>
+                <a:tc>
+                  <a:txBody>
+                    <a:bodyPr/>
+                    <a:lstStyle/>
+                    <a:p>
+                      <a:r>
+                        <a:rPr sz="1100" b="1">
+                          <a:solidFill>
+                            <a:srgbClr val="B06000"/>
+                          </a:solidFill>
+                          <a:latin typeface="Calibri"/>
+                        </a:rPr>
+                        <a:t>-37%</a:t>
+                      </a:r>
+                    </a:p>
+                  </a:txBody>
+                  <a:tcPr>
+                    <a:solidFill>
+                      <a:srgbClr val="FFFFFF"/>
+                    </a:solidFill>
+                  </a:tcPr>
+                </a:tc>
+              </a:tr>
+              <a:tr h="329184">
+                <a:tc>
+                  <a:txBody>
+                    <a:bodyPr/>
+                    <a:lstStyle/>
+                    <a:p>
+                      <a:r>
+                        <a:rPr sz="1100" b="1">
+                          <a:latin typeface="Calibri"/>
+                        </a:rPr>
+                        <a:t>parson</a:t>
+                      </a:r>
+                    </a:p>
+                  </a:txBody>
+                  <a:tcPr>
+                    <a:solidFill>
+                      <a:srgbClr val="EFF3F9"/>
+                    </a:solidFill>
+                  </a:tcPr>
+                </a:tc>
+                <a:tc>
+                  <a:txBody>
+                    <a:bodyPr/>
+                    <a:lstStyle/>
+                    <a:p>
+                      <a:r>
+                        <a:rPr sz="1100" b="0">
+                          <a:latin typeface="Calibri"/>
+                        </a:rPr>
+                        <a:t>0.35</a:t>
+                      </a:r>
+                    </a:p>
+                  </a:txBody>
+                  <a:tcPr>
+                    <a:solidFill>
+                      <a:srgbClr val="EFF3F9"/>
+                    </a:solidFill>
+                  </a:tcPr>
+                </a:tc>
+                <a:tc>
+                  <a:txBody>
+                    <a:bodyPr/>
+                    <a:lstStyle/>
+                    <a:p>
+                      <a:r>
+                        <a:rPr sz="1100" b="0">
+                          <a:latin typeface="Calibri"/>
+                        </a:rPr>
+                        <a:t>0.32</a:t>
+                      </a:r>
+                    </a:p>
+                  </a:txBody>
+                  <a:tcPr>
+                    <a:solidFill>
+                      <a:srgbClr val="EFF3F9"/>
+                    </a:solidFill>
+                  </a:tcPr>
+                </a:tc>
+                <a:tc>
+                  <a:txBody>
+                    <a:bodyPr/>
+                    <a:lstStyle/>
+                    <a:p>
+                      <a:r>
+                        <a:rPr sz="1100" b="1">
+                          <a:solidFill>
+                            <a:srgbClr val="187A33"/>
+                          </a:solidFill>
+                          <a:latin typeface="Calibri"/>
+                        </a:rPr>
+                        <a:t>+11%</a:t>
+                      </a:r>
+                    </a:p>
+                  </a:txBody>
+                  <a:tcPr>
+                    <a:solidFill>
+                      <a:srgbClr val="EFF3F9"/>
+                    </a:solidFill>
+                  </a:tcPr>
+                </a:tc>
+              </a:tr>
+              <a:tr h="329184">
+                <a:tc>
+                  <a:txBody>
+                    <a:bodyPr/>
+                    <a:lstStyle/>
+                    <a:p>
+                      <a:r>
+                        <a:rPr sz="1100" b="1">
+                          <a:latin typeface="Calibri"/>
+                        </a:rPr>
+                        <a:t>lz4-fast</a:t>
+                      </a:r>
+                    </a:p>
+                  </a:txBody>
+                  <a:tcPr>
+                    <a:solidFill>
+                      <a:srgbClr val="FFFFFF"/>
+                    </a:solidFill>
+                  </a:tcPr>
+                </a:tc>
+                <a:tc>
+                  <a:txBody>
+                    <a:bodyPr/>
+                    <a:lstStyle/>
+                    <a:p>
+                      <a:r>
+                        <a:rPr sz="1100" b="0">
+                          <a:latin typeface="Calibri"/>
+                        </a:rPr>
+                        <a:t>0.38</a:t>
+                      </a:r>
+                    </a:p>
+                  </a:txBody>
+                  <a:tcPr>
+                    <a:solidFill>
+                      <a:srgbClr val="FFFFFF"/>
+                    </a:solidFill>
+                  </a:tcPr>
+                </a:tc>
+                <a:tc>
+                  <a:txBody>
+                    <a:bodyPr/>
+                    <a:lstStyle/>
+                    <a:p>
+                      <a:r>
+                        <a:rPr sz="1100" b="0">
+                          <a:latin typeface="Calibri"/>
+                        </a:rPr>
+                        <a:t>0.31</a:t>
+                      </a:r>
+                    </a:p>
+                  </a:txBody>
+                  <a:tcPr>
+                    <a:solidFill>
+                      <a:srgbClr val="FFFFFF"/>
+                    </a:solidFill>
+                  </a:tcPr>
+                </a:tc>
+                <a:tc>
+                  <a:txBody>
+                    <a:bodyPr/>
+                    <a:lstStyle/>
+                    <a:p>
+                      <a:r>
+                        <a:rPr sz="1100" b="1">
+                          <a:solidFill>
+                            <a:srgbClr val="187A33"/>
+                          </a:solidFill>
+                          <a:latin typeface="Calibri"/>
+                        </a:rPr>
+                        <a:t>+22%</a:t>
+                      </a:r>
+                    </a:p>
+                  </a:txBody>
+                  <a:tcPr>
+                    <a:solidFill>
+                      <a:srgbClr val="FFFFFF"/>
+                    </a:solidFill>
+                  </a:tcPr>
+                </a:tc>
+              </a:tr>
+              <a:tr h="329184">
+                <a:tc>
+                  <a:txBody>
+                    <a:bodyPr/>
+                    <a:lstStyle/>
+                    <a:p>
+                      <a:r>
+                        <a:rPr sz="1100" b="1">
+                          <a:latin typeface="Calibri"/>
+                        </a:rPr>
+                        <a:t>rd-life</a:t>
+                      </a:r>
+                    </a:p>
+                  </a:txBody>
+                  <a:tcPr>
+                    <a:solidFill>
+                      <a:srgbClr val="EFF3F9"/>
+                    </a:solidFill>
+                  </a:tcPr>
+                </a:tc>
+                <a:tc>
+                  <a:txBody>
+                    <a:bodyPr/>
+                    <a:lstStyle/>
+                    <a:p>
+                      <a:r>
+                        <a:rPr sz="1100" b="0">
+                          <a:latin typeface="Calibri"/>
+                        </a:rPr>
+                        <a:t>0.57</a:t>
+                      </a:r>
+                    </a:p>
+                  </a:txBody>
+                  <a:tcPr>
+                    <a:solidFill>
+                      <a:srgbClr val="EFF3F9"/>
+                    </a:solidFill>
+                  </a:tcPr>
+                </a:tc>
+                <a:tc>
+                  <a:txBody>
+                    <a:bodyPr/>
+                    <a:lstStyle/>
+                    <a:p>
+                      <a:r>
+                        <a:rPr sz="1100" b="0">
+                          <a:latin typeface="Calibri"/>
+                        </a:rPr>
+                        <a:t>0.31</a:t>
+                      </a:r>
+                    </a:p>
+                  </a:txBody>
+                  <a:tcPr>
+                    <a:solidFill>
+                      <a:srgbClr val="EFF3F9"/>
+                    </a:solidFill>
+                  </a:tcPr>
+                </a:tc>
+                <a:tc>
+                  <a:txBody>
+                    <a:bodyPr/>
+                    <a:lstStyle/>
+                    <a:p>
+                      <a:r>
+                        <a:rPr sz="1100" b="1">
+                          <a:solidFill>
+                            <a:srgbClr val="B31412"/>
+                          </a:solidFill>
+                          <a:latin typeface="Calibri"/>
+                        </a:rPr>
+                        <a:t>+84%</a:t>
+                      </a:r>
+                    </a:p>
+                  </a:txBody>
+                  <a:tcPr>
+                    <a:solidFill>
+                      <a:srgbClr val="EFF3F9"/>
+                    </a:solidFill>
+                  </a:tcPr>
+                </a:tc>
+              </a:tr>
+            </a:tbl>
+          </a:graphicData>
+        </a:graphic>
+      </p:graphicFrame>
+      <p:sp>
+        <p:nvSpPr>
+          <p:cNvPr id="17" name="TextBox 16"/>
+          <p:cNvSpPr txBox="1"/>
+          <p:nvPr/>
+        </p:nvSpPr>
+        <p:spPr>
+          <a:xfrm>
+            <a:off x="548640" y="5230368"/>
+            <a:ext cx="6035040" cy="310896"/>
+          </a:xfrm>
+          <a:prstGeom prst="rect">
+            <a:avLst/>
+          </a:prstGeom>
+          <a:noFill/>
+        </p:spPr>
+        <p:txBody>
+          <a:bodyPr wrap="square">
+            <a:spAutoFit/>
+          </a:bodyPr>
+          <a:lstStyle/>
+          <a:p>
+            <a:pPr algn="l"/>
+            <a:r>
+              <a:rPr sz="1050" b="0">
+                <a:solidFill>
+                  <a:srgbClr val="5F6368"/>
+                </a:solidFill>
+                <a:latin typeface="Verdana"/>
+              </a:rPr>
+              <a:t>the 9 applications above 0.25 GB/s</a:t>
+            </a:r>
+          </a:p>
+        </p:txBody>
+      </p:sp>
+      <p:sp>
+        <p:nvSpPr>
+          <p:cNvPr id="18" name="Rounded Rectangle 17"/>
+          <p:cNvSpPr/>
+          <p:nvPr/>
+        </p:nvSpPr>
+        <p:spPr>
+          <a:xfrm>
+            <a:off x="6812280" y="2194560"/>
+            <a:ext cx="4800600" cy="1572768"/>
+          </a:xfrm>
+          <a:prstGeom prst="roundRect">
+            <a:avLst/>
+          </a:prstGeom>
+          <a:solidFill>
+            <a:srgbClr val="FDF6EC"/>
+          </a:solidFill>
+          <a:ln>
+            <a:solidFill>
+              <a:srgbClr val="B06000"/>
+            </a:solidFill>
+          </a:ln>
+        </p:spPr>
+        <p:style>
+          <a:lnRef idx="1">
+            <a:schemeClr val="accent1"/>
+          </a:lnRef>
+          <a:fillRef idx="3">
+            <a:schemeClr val="accent1"/>
+          </a:fillRef>
+          <a:effectRef idx="2">
+            <a:schemeClr val="accent1"/>
+          </a:effectRef>
+          <a:fontRef idx="minor">
+            <a:schemeClr val="lt1"/>
+          </a:fontRef>
+        </p:style>
+        <p:txBody>
+          <a:bodyPr rtlCol="0" anchor="ctr"/>
+          <a:lstStyle/>
+          <a:p>
             <a:pPr algn="ctr"/>
-            <a:r>
-              <a:rPr sz="1600" b="1" dirty="0">
+          </a:p>
+        </p:txBody>
+      </p:sp>
+      <p:sp>
+        <p:nvSpPr>
+          <p:cNvPr id="19" name="TextBox 18"/>
+          <p:cNvSpPr txBox="1"/>
+          <p:nvPr/>
+        </p:nvSpPr>
+        <p:spPr>
+          <a:xfrm>
+            <a:off x="7059168" y="2304288"/>
+            <a:ext cx="4343400" cy="1371600"/>
+          </a:xfrm>
+          <a:prstGeom prst="rect">
+            <a:avLst/>
+          </a:prstGeom>
+          <a:noFill/>
+        </p:spPr>
+        <p:txBody>
+          <a:bodyPr wrap="square">
+            <a:spAutoFit/>
+          </a:bodyPr>
+          <a:lstStyle/>
+          <a:p>
+            <a:pPr algn="l"/>
+            <a:r>
+              <a:rPr sz="1150" b="0">
                 <a:solidFill>
                   <a:srgbClr val="202124"/>
                 </a:solidFill>
-                <a:latin typeface="Calibri"/>
+                <a:latin typeface="Verdana"/>
               </a:rPr>
-              <a:t>Why the power result survives it: 47 of 50 applications run below 0.5 GB/s, where the entire bandwidth term is worth under 27 </a:t>
-            </a:r>
-            <a:r>
-              <a:rPr sz="1600" b="1" dirty="0" err="1">
+              <a:t>A correction. An earlier version of this slide reported a 2x over-report and blamed write streaming. That compared QEMU's read+write TRANSACTION count against l3d_cache_refill, which is a REFILL counter and sees reads only. The gap was the unit, not the emulator.</a:t>
+            </a:r>
+          </a:p>
+        </p:txBody>
+      </p:sp>
+      <p:sp>
+        <p:nvSpPr>
+          <p:cNvPr id="20" name="TextBox 19"/>
+          <p:cNvSpPr txBox="1"/>
+          <p:nvPr/>
+        </p:nvSpPr>
+        <p:spPr>
+          <a:xfrm>
+            <a:off x="6812280" y="3895344"/>
+            <a:ext cx="4800600" cy="310896"/>
+          </a:xfrm>
+          <a:prstGeom prst="rect">
+            <a:avLst/>
+          </a:prstGeom>
+          <a:noFill/>
+        </p:spPr>
+        <p:txBody>
+          <a:bodyPr wrap="square">
+            <a:spAutoFit/>
+          </a:bodyPr>
+          <a:lstStyle/>
+          <a:p>
+            <a:pPr algn="l"/>
+            <a:r>
+              <a:rPr sz="1200" b="1">
                 <a:solidFill>
                   <a:srgbClr val="202124"/>
                 </a:solidFill>
-                <a:latin typeface="Calibri"/>
+                <a:latin typeface="Verdana"/>
               </a:rPr>
-              <a:t>mW</a:t>
-            </a:r>
-            <a:r>
-              <a:rPr sz="1600" b="1" dirty="0">
+              <a:t>What is genuinely off:</a:t>
+            </a:r>
+          </a:p>
+        </p:txBody>
+      </p:sp>
+      <p:sp>
+        <p:nvSpPr>
+          <p:cNvPr id="21" name="TextBox 20"/>
+          <p:cNvSpPr txBox="1"/>
+          <p:nvPr/>
+        </p:nvSpPr>
+        <p:spPr>
+          <a:xfrm>
+            <a:off x="6812280" y="4206240"/>
+            <a:ext cx="4800600" cy="1280160"/>
+          </a:xfrm>
+          <a:prstGeom prst="rect">
+            <a:avLst/>
+          </a:prstGeom>
+          <a:noFill/>
+        </p:spPr>
+        <p:txBody>
+          <a:bodyPr wrap="square">
+            <a:spAutoFit/>
+          </a:bodyPr>
+          <a:lstStyle/>
+          <a:p>
+            <a:pPr algn="l"/>
+            <a:r>
+              <a:rPr sz="1150" b="0">
                 <a:solidFill>
-                  <a:srgbClr val="202124"/>
+                  <a:srgbClr val="5F6368"/>
                 </a:solidFill>
-                <a:latin typeface="Calibri"/>
+                <a:latin typeface="Verdana"/>
               </a:rPr>
-              <a:t> of a ~1400 </a:t>
-            </a:r>
-            <a:r>
-              <a:rPr sz="1600" b="1" dirty="0" err="1">
+              <a:t>Two compute-bound workloads where QEMU's cache model misses too often — mm-big (+149%) and rd-life (+84%). Both are small-footprint and reuse-heavy, exactly where a modelled cache and a real one diverge most. The streaming workloads, where absolute bandwidth is largest, agree to within 11%.</a:t>
+            </a:r>
+          </a:p>
+        </p:txBody>
+      </p:sp>
+      <p:sp>
+        <p:nvSpPr>
+          <p:cNvPr id="22" name="TextBox 21"/>
+          <p:cNvSpPr txBox="1"/>
+          <p:nvPr/>
+        </p:nvSpPr>
+        <p:spPr>
+          <a:xfrm>
+            <a:off x="548640" y="5632704"/>
+            <a:ext cx="11064240" cy="768096"/>
+          </a:xfrm>
+          <a:prstGeom prst="rect">
+            <a:avLst/>
+          </a:prstGeom>
+          <a:noFill/>
+        </p:spPr>
+        <p:txBody>
+          <a:bodyPr wrap="square">
+            <a:spAutoFit/>
+          </a:bodyPr>
+          <a:lstStyle/>
+          <a:p>
+            <a:pPr algn="l"/>
+            <a:r>
+              <a:rPr sz="1100" b="0">
                 <a:solidFill>
-                  <a:srgbClr val="202124"/>
+                  <a:srgbClr val="1F5CA8"/>
                 </a:solidFill>
-                <a:latin typeface="Calibri"/>
+                <a:latin typeface="Verdana"/>
               </a:rPr>
-              <a:t>mW</a:t>
-            </a:r>
-            <a:r>
-              <a:rPr sz="1600" b="1" dirty="0">
-                <a:solidFill>
-                  <a:srgbClr val="202124"/>
-                </a:solidFill>
-                <a:latin typeface="Calibri"/>
-              </a:rPr>
-              <a:t> budget. The error is real, it is in the right place to be harmless for application workloads, and it is the first thing to fix before this is pointed at streaming or DMA-heavy code.</a:t>
+              <a:t>Both directions matter and neither is large in mW. QEMU also reports 0.000 GB/s for the whole busybox family where silicon measures real traffic (bb-md5 0.148 GB/s), because QEMU linux-user models only the application's own accesses while the PMU counts everything on the core, kernel included. Worth under 9 mW.</a:t>
             </a:r>
           </a:p>
         </p:txBody>
@@ -14742,7 +16417,7 @@
                 </a:solidFill>
                 <a:latin typeface="Calibri"/>
               </a:rPr>
-              <a:t>6</a:t>
+              <a:t>7</a:t>
             </a:r>
           </a:p>
         </p:txBody>
@@ -15675,7 +17350,7 @@
                 </a:solidFill>
                 <a:latin typeface="Calibri"/>
               </a:rPr>
-              <a:t>7</a:t>
+              <a:t>8</a:t>
             </a:r>
           </a:p>
         </p:txBody>
@@ -16442,7 +18117,7 @@
                 </a:solidFill>
                 <a:latin typeface="Calibri"/>
               </a:rPr>
-              <a:t>8</a:t>
+              <a:t>9</a:t>
             </a:r>
           </a:p>
         </p:txBody>
@@ -18407,7 +20082,7 @@
                 </a:solidFill>
                 <a:latin typeface="Calibri"/>
               </a:rPr>
-              <a:t>9</a:t>
+              <a:t>10</a:t>
             </a:r>
           </a:p>
         </p:txBody>
@@ -18442,7 +20117,7 @@
                 </a:solidFill>
                 <a:latin typeface="Calibri"/>
               </a:rPr>
-              <a:t>GREEN ≤ 8%  ·  AMBER 8–12%  ·  RED &gt; 12%   (8% = the published bar for a good per-rail model)   ·   GB/s = DDR bandwidth, MEASURED on silicon</a:t>
+              <a:t>GREEN ≤ 8%  ·  AMBER 8–12%  ·  RED &gt; 12%   (8% = the published bar for a good per-rail model)   ·   GB/s = DDR read bandwidth, MEASURED on silicon</a:t>
             </a:r>
           </a:p>
         </p:txBody>

--- a/xcheck/wattson_power_results_final_KF_9_10_2026.pptx
+++ b/xcheck/wattson_power_results_final_KF_9_10_2026.pptx
@@ -5398,7 +5398,7 @@
                 </a:solidFill>
                 <a:latin typeface="Calibri"/>
               </a:rPr>
-              <a:t>The last column re-runs each prediction using activity measured on silicon instead of QEMU, which separates the model from the emulator. They agree on the edge mixes — so the error there is the model's, not QEMU's. They diverge only on the streaming control (6.5% vs 1.4%), where QEMU's DRAM proxy over-reports bandwidth. Edge workloads run at 0.4–0.7 GB/s and are barely exposed to it.</a:t>
+              <a:t>The last column re-runs each prediction using activity measured on silicon instead of QEMU, which separates the model from the emulator. They agree on the edge mixes — so the error there is the model's, not QEMU's. They diverge only on the streaming control (6.5% vs 1.4%), where reads and writes are charged alike by the model's single bandwidth term. These mixes run at 0.4–0.7 GB/s and are barely exposed to it.</a:t>
             </a:r>
           </a:p>
         </p:txBody>
@@ -5900,13 +5900,13 @@
                         <a:rPr sz="1400" b="0" dirty="0">
                           <a:latin typeface="Calibri"/>
                         </a:rPr>
-                        <a:t>over-reports ~2x; write streaming is not modelled</a:t>
+                        <a:t>reads track silicon; reads and writes share one coefficient</a:t>
                       </a:r>
                       <a:r>
                         <a:rPr lang="en-US" sz="1400" b="0" dirty="0">
                           <a:latin typeface="Calibri"/>
                         </a:rPr>
-                        <a:t> (next task)</a:t>
+                        <a:t/>
                       </a:r>
                       <a:endParaRPr sz="1400" b="0" dirty="0">
                         <a:latin typeface="Calibri"/>
@@ -6183,13 +6183,13 @@
                         <a:rPr sz="1400" b="0" dirty="0">
                           <a:latin typeface="Calibri"/>
                         </a:rPr>
-                        <a:t>the bandwidth gap lands directly on it</a:t>
+                        <a:t>write-heavy streams over-predict 12-13% (measured to 11 GB/s)</a:t>
                       </a:r>
                       <a:r>
                         <a:rPr lang="en-US" sz="1400" b="0" dirty="0">
                           <a:latin typeface="Calibri"/>
                         </a:rPr>
-                        <a:t> (task 2 to fix)</a:t>
+                        <a:t/>
                       </a:r>
                       <a:endParaRPr sz="1400" b="0" dirty="0">
                         <a:latin typeface="Calibri"/>
@@ -11273,7 +11273,7 @@
                 </a:solidFill>
                 <a:latin typeface="Calibri"/>
               </a:rPr>
-              <a:t>Memory </a:t>
+              <a:t>DRAM read traffic tracks silicon to within 11% on streaming workloads. Reads and writes share one term, which is the model's known limit.</a:t>
             </a:r>
             <a:r>
               <a:rPr lang="en-US" b="0" dirty="0">
@@ -11282,7 +11282,7 @@
                 </a:solidFill>
                 <a:latin typeface="Calibri"/>
               </a:rPr>
-              <a:t>b/w</a:t>
+              <a:t/>
             </a:r>
             <a:r>
               <a:rPr b="0" dirty="0">
@@ -11291,7 +11291,7 @@
                 </a:solidFill>
                 <a:latin typeface="Calibri"/>
               </a:rPr>
-              <a:t> is over-reported by roughly 2x. Bounded, understood, and localized to streaming workloads.</a:t>
+              <a:t/>
             </a:r>
           </a:p>
         </p:txBody>
@@ -14780,7 +14780,7 @@
                 </a:solidFill>
                 <a:latin typeface="Calibri"/>
               </a:rPr>
-              <a:t>Part 1 — Where QEMU does not see the same work</a:t>
+              <a:t>Part 1 — Bandwidth: where QEMU and silicon differ</a:t>
             </a:r>
           </a:p>
         </p:txBody>
@@ -14859,7 +14859,7 @@
                 </a:solidFill>
                 <a:latin typeface="Calibri"/>
               </a:rPr>
-              <a:t>Memory bandwidth. QEMU's DRAM proxy against the A55's l3d_cache_refill counter.</a:t>
+              <a:t>Memory bandwidth. QEMU's DRAM read traffic against the A55's l3d_cache_refill counter.</a:t>
             </a:r>
           </a:p>
         </p:txBody>
@@ -15112,7 +15112,7 @@
         </p:nvGraphicFramePr>
         <p:xfrm>
           <a:off x="548640" y="2194560"/>
-          <a:ext cx="6035040" cy="3291840"/>
+          <a:ext cx="6035040" cy="2926080"/>
         </p:xfrm>
         <a:graphic>
           <a:graphicData uri="http://schemas.openxmlformats.org/drawingml/2006/table">
@@ -15126,7 +15126,7 @@
                 <a:gridCol w="1463040"/>
                 <a:gridCol w="1371600"/>
               </a:tblGrid>
-              <a:tr h="329184">
+              <a:tr h="292608">
                 <a:tc>
                   <a:txBody>
                     <a:bodyPr/>
@@ -15216,7 +15216,7 @@
                   </a:tcPr>
                 </a:tc>
               </a:tr>
-              <a:tr h="329184">
+              <a:tr h="292608">
                 <a:tc>
                   <a:txBody>
                     <a:bodyPr/>
@@ -15297,7 +15297,7 @@
                   </a:tcPr>
                 </a:tc>
               </a:tr>
-              <a:tr h="329184">
+              <a:tr h="292608">
                 <a:tc>
                   <a:txBody>
                     <a:bodyPr/>
@@ -15378,7 +15378,7 @@
                   </a:tcPr>
                 </a:tc>
               </a:tr>
-              <a:tr h="329184">
+              <a:tr h="292608">
                 <a:tc>
                   <a:txBody>
                     <a:bodyPr/>
@@ -15459,7 +15459,7 @@
                   </a:tcPr>
                 </a:tc>
               </a:tr>
-              <a:tr h="329184">
+              <a:tr h="292608">
                 <a:tc>
                   <a:txBody>
                     <a:bodyPr/>
@@ -15540,7 +15540,7 @@
                   </a:tcPr>
                 </a:tc>
               </a:tr>
-              <a:tr h="329184">
+              <a:tr h="292608">
                 <a:tc>
                   <a:txBody>
                     <a:bodyPr/>
@@ -15621,7 +15621,7 @@
                   </a:tcPr>
                 </a:tc>
               </a:tr>
-              <a:tr h="329184">
+              <a:tr h="292608">
                 <a:tc>
                   <a:txBody>
                     <a:bodyPr/>
@@ -15702,7 +15702,7 @@
                   </a:tcPr>
                 </a:tc>
               </a:tr>
-              <a:tr h="329184">
+              <a:tr h="292608">
                 <a:tc>
                   <a:txBody>
                     <a:bodyPr/>
@@ -15783,7 +15783,7 @@
                   </a:tcPr>
                 </a:tc>
               </a:tr>
-              <a:tr h="329184">
+              <a:tr h="292608">
                 <a:tc>
                   <a:txBody>
                     <a:bodyPr/>
@@ -15864,7 +15864,7 @@
                   </a:tcPr>
                 </a:tc>
               </a:tr>
-              <a:tr h="329184">
+              <a:tr h="292608">
                 <a:tc>
                   <a:txBody>
                     <a:bodyPr/>
@@ -15957,7 +15957,7 @@
         </p:nvSpPr>
         <p:spPr>
           <a:xfrm>
-            <a:off x="548640" y="5230368"/>
+            <a:off x="548640" y="5175504"/>
             <a:ext cx="6035040" cy="310896"/>
           </a:xfrm>
           <a:prstGeom prst="rect">
@@ -16059,7 +16059,7 @@
                 </a:solidFill>
                 <a:latin typeface="Verdana"/>
               </a:rPr>
-              <a:t>A correction. An earlier version of this slide reported a 2x over-report and blamed write streaming. That compared QEMU's read+write TRANSACTION count against l3d_cache_refill, which is a REFILL counter and sees reads only. The gap was the unit, not the emulator.</a:t>
+              <a:t>Like for like — QEMU's DRAM READ traffic against the A55's l3d_cache_refill, which is a refill counter and sees reads. The streaming workloads, where absolute bandwidth is largest and where it therefore matters most for power, agree to within 11%.</a:t>
             </a:r>
           </a:p>
         </p:txBody>
@@ -16094,7 +16094,7 @@
                 </a:solidFill>
                 <a:latin typeface="Verdana"/>
               </a:rPr>
-              <a:t>What is genuinely off:</a:t>
+              <a:t>Where it is genuinely off:</a:t>
             </a:r>
           </a:p>
         </p:txBody>
@@ -16129,7 +16129,7 @@
                 </a:solidFill>
                 <a:latin typeface="Verdana"/>
               </a:rPr>
-              <a:t>Two compute-bound workloads where QEMU's cache model misses too often — mm-big (+149%) and rd-life (+84%). Both are small-footprint and reuse-heavy, exactly where a modelled cache and a real one diverge most. The streaming workloads, where absolute bandwidth is largest, agree to within 11%.</a:t>
+              <a:t>Two compute-bound workloads where the modelled cache misses too often — mm-big (+149%) and rd-life (+84%). Both are small-footprint and reuse-heavy, exactly where a modelled cache and a real one diverge most. Neither moves enough traffic for it to cost more than a few mW.</a:t>
             </a:r>
           </a:p>
         </p:txBody>

--- a/xcheck/wattson_power_results_final_KF_9_10_2026.pptx
+++ b/xcheck/wattson_power_results_final_KF_9_10_2026.pptx
@@ -19,6 +19,7 @@
     <p:sldId id="266" r:id="rId12"/>
     <p:sldId id="268" r:id="rId20"/>
     <p:sldId id="269" r:id="rId21"/>
+    <p:sldId id="271" r:id="rId23"/>
     <p:sldId id="267" r:id="rId13"/>
   </p:sldIdLst>
   <p:sldSz cx="12192000" cy="6858000"/>
@@ -6726,7 +6727,7 @@
                 </a:solidFill>
                 <a:latin typeface="Calibri"/>
               </a:rPr>
-              <a:t>15</a:t>
+              <a:t>16</a:t>
             </a:r>
           </a:p>
         </p:txBody>
@@ -10747,6 +10748,1304 @@
                 <a:latin typeface="Verdana"/>
               </a:rPr>
               <a:t>Two guesses that were wrong, and worth knowing: YUV→RGB frame conversion is compute-bound (1.4 IPC), and sparse gather is latency-bound, not bandwidth-bound.</a:t>
+            </a:r>
+          </a:p>
+        </p:txBody>
+      </p:sp>
+    </p:spTree>
+  </p:cSld>
+  <p:clrMapOvr>
+    <a:masterClrMapping/>
+  </p:clrMapOvr>
+</p:sld>
+</file>
+
+<file path=ppt/slides/slide16.xml><?xml version="1.0" encoding="utf-8"?>
+<p:sld xmlns:a="http://schemas.openxmlformats.org/drawingml/2006/main" xmlns:p="http://schemas.openxmlformats.org/presentationml/2006/main" xmlns:r="http://schemas.openxmlformats.org/officeDocument/2006/relationships">
+  <p:cSld>
+    <p:spTree>
+      <p:nvGrpSpPr>
+        <p:cNvPr id="1" name=""/>
+        <p:cNvGrpSpPr/>
+        <p:nvPr/>
+      </p:nvGrpSpPr>
+      <p:grpSpPr/>
+      <p:sp>
+        <p:nvSpPr>
+          <p:cNvPr id="2" name="Rectangle 1"/>
+          <p:cNvSpPr/>
+          <p:nvPr/>
+        </p:nvSpPr>
+        <p:spPr>
+          <a:xfrm>
+            <a:off x="0" y="0"/>
+            <a:ext cx="12192000" cy="841248"/>
+          </a:xfrm>
+          <a:prstGeom prst="rect">
+            <a:avLst/>
+          </a:prstGeom>
+          <a:solidFill>
+            <a:srgbClr val="202124"/>
+          </a:solidFill>
+          <a:ln>
+            <a:noFill/>
+          </a:ln>
+        </p:spPr>
+        <p:style>
+          <a:lnRef idx="1">
+            <a:schemeClr val="accent1"/>
+          </a:lnRef>
+          <a:fillRef idx="3">
+            <a:schemeClr val="accent1"/>
+          </a:fillRef>
+          <a:effectRef idx="2">
+            <a:schemeClr val="accent1"/>
+          </a:effectRef>
+          <a:fontRef idx="minor">
+            <a:schemeClr val="lt1"/>
+          </a:fontRef>
+        </p:style>
+        <p:txBody>
+          <a:bodyPr rtlCol="0" anchor="ctr"/>
+          <a:lstStyle/>
+          <a:p>
+            <a:pPr algn="ctr"/>
+          </a:p>
+        </p:txBody>
+      </p:sp>
+      <p:sp>
+        <p:nvSpPr>
+          <p:cNvPr id="3" name="TextBox 2"/>
+          <p:cNvSpPr txBox="1"/>
+          <p:nvPr/>
+        </p:nvSpPr>
+        <p:spPr>
+          <a:xfrm>
+            <a:off x="548640" y="118872"/>
+            <a:ext cx="11155680" cy="603504"/>
+          </a:xfrm>
+          <a:prstGeom prst="rect">
+            <a:avLst/>
+          </a:prstGeom>
+          <a:noFill/>
+        </p:spPr>
+        <p:txBody>
+          <a:bodyPr wrap="square">
+            <a:spAutoFit/>
+          </a:bodyPr>
+          <a:lstStyle/>
+          <a:p>
+            <a:pPr algn="l"/>
+            <a:r>
+              <a:rPr sz="2600" b="1">
+                <a:solidFill>
+                  <a:srgbClr val="FFFFFF"/>
+                </a:solidFill>
+                <a:latin typeface="Verdana"/>
+              </a:rPr>
+              <a:t>Against the assumption used today</a:t>
+            </a:r>
+          </a:p>
+        </p:txBody>
+      </p:sp>
+      <p:sp>
+        <p:nvSpPr>
+          <p:cNvPr id="4" name="Rectangle 3"/>
+          <p:cNvSpPr/>
+          <p:nvPr/>
+        </p:nvSpPr>
+        <p:spPr>
+          <a:xfrm>
+            <a:off x="0" y="841248"/>
+            <a:ext cx="12192000" cy="38100"/>
+          </a:xfrm>
+          <a:prstGeom prst="rect">
+            <a:avLst/>
+          </a:prstGeom>
+          <a:solidFill>
+            <a:srgbClr val="1F5CA8"/>
+          </a:solidFill>
+          <a:ln>
+            <a:noFill/>
+          </a:ln>
+        </p:spPr>
+        <p:style>
+          <a:lnRef idx="1">
+            <a:schemeClr val="accent1"/>
+          </a:lnRef>
+          <a:fillRef idx="3">
+            <a:schemeClr val="accent1"/>
+          </a:fillRef>
+          <a:effectRef idx="2">
+            <a:schemeClr val="accent1"/>
+          </a:effectRef>
+          <a:fontRef idx="minor">
+            <a:schemeClr val="lt1"/>
+          </a:fontRef>
+        </p:style>
+        <p:txBody>
+          <a:bodyPr rtlCol="0" anchor="ctr"/>
+          <a:lstStyle/>
+          <a:p>
+            <a:pPr algn="ctr"/>
+          </a:p>
+        </p:txBody>
+      </p:sp>
+      <p:sp>
+        <p:nvSpPr>
+          <p:cNvPr id="5" name="TextBox 4"/>
+          <p:cNvSpPr txBox="1"/>
+          <p:nvPr/>
+        </p:nvSpPr>
+        <p:spPr>
+          <a:xfrm>
+            <a:off x="548640" y="969264"/>
+            <a:ext cx="11155680" cy="365760"/>
+          </a:xfrm>
+          <a:prstGeom prst="rect">
+            <a:avLst/>
+          </a:prstGeom>
+          <a:noFill/>
+        </p:spPr>
+        <p:txBody>
+          <a:bodyPr wrap="square">
+            <a:spAutoFit/>
+          </a:bodyPr>
+          <a:lstStyle/>
+          <a:p>
+            <a:pPr algn="l"/>
+            <a:r>
+              <a:rPr sz="1200" b="0">
+                <a:solidFill>
+                  <a:srgbClr val="5F6368"/>
+                </a:solidFill>
+                <a:latin typeface="Verdana"/>
+              </a:rPr>
+              <a:t>Nobody has to trust an emulator in absolute terms. The question is whether it beats a flat activity factor — which is what a power estimate is multiplied by now.</a:t>
+            </a:r>
+          </a:p>
+        </p:txBody>
+      </p:sp>
+      <p:sp>
+        <p:nvSpPr>
+          <p:cNvPr id="6" name="TextBox 5"/>
+          <p:cNvSpPr txBox="1"/>
+          <p:nvPr/>
+        </p:nvSpPr>
+        <p:spPr>
+          <a:xfrm>
+            <a:off x="548640" y="6528816"/>
+            <a:ext cx="10424160" cy="274320"/>
+          </a:xfrm>
+          <a:prstGeom prst="rect">
+            <a:avLst/>
+          </a:prstGeom>
+          <a:noFill/>
+        </p:spPr>
+        <p:txBody>
+          <a:bodyPr wrap="square">
+            <a:spAutoFit/>
+          </a:bodyPr>
+          <a:lstStyle/>
+          <a:p>
+            <a:pPr algn="l"/>
+            <a:r>
+              <a:rPr sz="950" b="0">
+                <a:solidFill>
+                  <a:srgbClr val="5F6368"/>
+                </a:solidFill>
+                <a:latin typeface="Verdana"/>
+              </a:rPr>
+              <a:t>wattson power · rails MEASURED on IMX95LPD5EVK-19 (NXP BCU) · A55 die 40–41 °C under load · activity DERIVED from QEMU TCG · 2026-09-10</a:t>
+            </a:r>
+          </a:p>
+        </p:txBody>
+      </p:sp>
+      <p:sp>
+        <p:nvSpPr>
+          <p:cNvPr id="7" name="TextBox 6"/>
+          <p:cNvSpPr txBox="1"/>
+          <p:nvPr/>
+        </p:nvSpPr>
+        <p:spPr>
+          <a:xfrm>
+            <a:off x="11430000" y="6528816"/>
+            <a:ext cx="457200" cy="274320"/>
+          </a:xfrm>
+          <a:prstGeom prst="rect">
+            <a:avLst/>
+          </a:prstGeom>
+          <a:noFill/>
+        </p:spPr>
+        <p:txBody>
+          <a:bodyPr wrap="square">
+            <a:spAutoFit/>
+          </a:bodyPr>
+          <a:lstStyle/>
+          <a:p>
+            <a:pPr algn="r"/>
+            <a:r>
+              <a:rPr sz="950" b="0">
+                <a:solidFill>
+                  <a:srgbClr val="5F6368"/>
+                </a:solidFill>
+                <a:latin typeface="Verdana"/>
+              </a:rPr>
+              <a:t>15</a:t>
+            </a:r>
+          </a:p>
+        </p:txBody>
+      </p:sp>
+      <p:sp>
+        <p:nvSpPr>
+          <p:cNvPr id="8" name="Rectangle 7"/>
+          <p:cNvSpPr/>
+          <p:nvPr/>
+        </p:nvSpPr>
+        <p:spPr>
+          <a:xfrm>
+            <a:off x="548640" y="1572768"/>
+            <a:ext cx="11064240" cy="548640"/>
+          </a:xfrm>
+          <a:prstGeom prst="rect">
+            <a:avLst/>
+          </a:prstGeom>
+          <a:solidFill>
+            <a:srgbClr val="187A33"/>
+          </a:solidFill>
+          <a:ln>
+            <a:noFill/>
+          </a:ln>
+        </p:spPr>
+        <p:style>
+          <a:lnRef idx="1">
+            <a:schemeClr val="accent1"/>
+          </a:lnRef>
+          <a:fillRef idx="3">
+            <a:schemeClr val="accent1"/>
+          </a:fillRef>
+          <a:effectRef idx="2">
+            <a:schemeClr val="accent1"/>
+          </a:effectRef>
+          <a:fontRef idx="minor">
+            <a:schemeClr val="lt1"/>
+          </a:fontRef>
+        </p:style>
+        <p:txBody>
+          <a:bodyPr rtlCol="0" anchor="ctr"/>
+          <a:lstStyle/>
+          <a:p>
+            <a:pPr algn="ctr"/>
+          </a:p>
+        </p:txBody>
+      </p:sp>
+      <p:sp>
+        <p:nvSpPr>
+          <p:cNvPr id="9" name="TextBox 8"/>
+          <p:cNvSpPr txBox="1"/>
+          <p:nvPr/>
+        </p:nvSpPr>
+        <p:spPr>
+          <a:xfrm>
+            <a:off x="822960" y="1645920"/>
+            <a:ext cx="10607040" cy="420624"/>
+          </a:xfrm>
+          <a:prstGeom prst="rect">
+            <a:avLst/>
+          </a:prstGeom>
+          <a:noFill/>
+        </p:spPr>
+        <p:txBody>
+          <a:bodyPr wrap="square">
+            <a:spAutoFit/>
+          </a:bodyPr>
+          <a:lstStyle/>
+          <a:p>
+            <a:pPr algn="l"/>
+            <a:r>
+              <a:rPr sz="1800" b="1">
+                <a:solidFill>
+                  <a:srgbClr val="FFFFFF"/>
+                </a:solidFill>
+                <a:latin typeface="Verdana"/>
+              </a:rPr>
+              <a:t>Worst case 49% against 15%, over 60 measured operating points.</a:t>
+            </a:r>
+          </a:p>
+        </p:txBody>
+      </p:sp>
+      <p:graphicFrame>
+        <p:nvGraphicFramePr>
+          <p:cNvPr id="10" name="Table 9"/>
+          <p:cNvGraphicFramePr>
+            <a:graphicFrameLocks noGrp="1"/>
+          </p:cNvGraphicFramePr>
+          <p:nvPr/>
+        </p:nvGraphicFramePr>
+        <p:xfrm>
+          <a:off x="548640" y="2286000"/>
+          <a:ext cx="11064240" cy="1371600"/>
+        </p:xfrm>
+        <a:graphic>
+          <a:graphicData uri="http://schemas.openxmlformats.org/drawingml/2006/table">
+            <a:tbl>
+              <a:tblPr firstRow="1" bandRow="1">
+                <a:tableStyleId>{5C22544A-7EE6-4342-B048-85BDC9FD1C3A}</a:tableStyleId>
+              </a:tblPr>
+              <a:tblGrid>
+                <a:gridCol w="3200400"/>
+                <a:gridCol w="1188720"/>
+                <a:gridCol w="1280160"/>
+                <a:gridCol w="5394960"/>
+              </a:tblGrid>
+              <a:tr h="457200">
+                <a:tc>
+                  <a:txBody>
+                    <a:bodyPr/>
+                    <a:lstStyle/>
+                    <a:p>
+                      <a:r>
+                        <a:rPr sz="1200" b="1">
+                          <a:solidFill>
+                            <a:srgbClr val="FFFFFF"/>
+                          </a:solidFill>
+                          <a:latin typeface="Calibri"/>
+                        </a:rPr>
+                        <a:t>method</a:t>
+                      </a:r>
+                    </a:p>
+                  </a:txBody>
+                  <a:tcPr>
+                    <a:solidFill>
+                      <a:srgbClr val="202124"/>
+                    </a:solidFill>
+                  </a:tcPr>
+                </a:tc>
+                <a:tc>
+                  <a:txBody>
+                    <a:bodyPr/>
+                    <a:lstStyle/>
+                    <a:p>
+                      <a:r>
+                        <a:rPr sz="1200" b="1">
+                          <a:solidFill>
+                            <a:srgbClr val="FFFFFF"/>
+                          </a:solidFill>
+                          <a:latin typeface="Calibri"/>
+                        </a:rPr>
+                        <a:t>mean</a:t>
+                      </a:r>
+                    </a:p>
+                  </a:txBody>
+                  <a:tcPr>
+                    <a:solidFill>
+                      <a:srgbClr val="202124"/>
+                    </a:solidFill>
+                  </a:tcPr>
+                </a:tc>
+                <a:tc>
+                  <a:txBody>
+                    <a:bodyPr/>
+                    <a:lstStyle/>
+                    <a:p>
+                      <a:r>
+                        <a:rPr sz="1200" b="1">
+                          <a:solidFill>
+                            <a:srgbClr val="FFFFFF"/>
+                          </a:solidFill>
+                          <a:latin typeface="Calibri"/>
+                        </a:rPr>
+                        <a:t>worst</a:t>
+                      </a:r>
+                    </a:p>
+                  </a:txBody>
+                  <a:tcPr>
+                    <a:solidFill>
+                      <a:srgbClr val="202124"/>
+                    </a:solidFill>
+                  </a:tcPr>
+                </a:tc>
+                <a:tc>
+                  <a:txBody>
+                    <a:bodyPr/>
+                    <a:lstStyle/>
+                    <a:p>
+                      <a:r>
+                        <a:rPr sz="1200" b="1">
+                          <a:solidFill>
+                            <a:srgbClr val="FFFFFF"/>
+                          </a:solidFill>
+                          <a:latin typeface="Calibri"/>
+                        </a:rPr>
+                        <a:t>what it can distinguish</a:t>
+                      </a:r>
+                    </a:p>
+                  </a:txBody>
+                  <a:tcPr>
+                    <a:solidFill>
+                      <a:srgbClr val="202124"/>
+                    </a:solidFill>
+                  </a:tcPr>
+                </a:tc>
+              </a:tr>
+              <a:tr h="457200">
+                <a:tc>
+                  <a:txBody>
+                    <a:bodyPr/>
+                    <a:lstStyle/>
+                    <a:p>
+                      <a:r>
+                        <a:rPr sz="1200" b="1">
+                          <a:latin typeface="Calibri"/>
+                        </a:rPr>
+                        <a:t>a flat activity assumption</a:t>
+                      </a:r>
+                    </a:p>
+                  </a:txBody>
+                  <a:tcPr>
+                    <a:solidFill>
+                      <a:srgbClr val="EFF3F9"/>
+                    </a:solidFill>
+                  </a:tcPr>
+                </a:tc>
+                <a:tc>
+                  <a:txBody>
+                    <a:bodyPr/>
+                    <a:lstStyle/>
+                    <a:p>
+                      <a:r>
+                        <a:rPr sz="1200" b="1">
+                          <a:solidFill>
+                            <a:srgbClr val="B31412"/>
+                          </a:solidFill>
+                          <a:latin typeface="Calibri"/>
+                        </a:rPr>
+                        <a:t>7.4%</a:t>
+                      </a:r>
+                    </a:p>
+                  </a:txBody>
+                  <a:tcPr>
+                    <a:solidFill>
+                      <a:srgbClr val="EFF3F9"/>
+                    </a:solidFill>
+                  </a:tcPr>
+                </a:tc>
+                <a:tc>
+                  <a:txBody>
+                    <a:bodyPr/>
+                    <a:lstStyle/>
+                    <a:p>
+                      <a:r>
+                        <a:rPr sz="1200" b="1">
+                          <a:solidFill>
+                            <a:srgbClr val="B31412"/>
+                          </a:solidFill>
+                          <a:latin typeface="Calibri"/>
+                        </a:rPr>
+                        <a:t>49.4%</a:t>
+                      </a:r>
+                    </a:p>
+                  </a:txBody>
+                  <a:tcPr>
+                    <a:solidFill>
+                      <a:srgbClr val="EFF3F9"/>
+                    </a:solidFill>
+                  </a:tcPr>
+                </a:tc>
+                <a:tc>
+                  <a:txBody>
+                    <a:bodyPr/>
+                    <a:lstStyle/>
+                    <a:p>
+                      <a:r>
+                        <a:rPr sz="1200" b="0">
+                          <a:latin typeface="Calibri"/>
+                        </a:rPr>
+                        <a:t>one number for every workload — it cannot tell two applications apart</a:t>
+                      </a:r>
+                    </a:p>
+                  </a:txBody>
+                  <a:tcPr>
+                    <a:solidFill>
+                      <a:srgbClr val="EFF3F9"/>
+                    </a:solidFill>
+                  </a:tcPr>
+                </a:tc>
+              </a:tr>
+              <a:tr h="457200">
+                <a:tc>
+                  <a:txBody>
+                    <a:bodyPr/>
+                    <a:lstStyle/>
+                    <a:p>
+                      <a:r>
+                        <a:rPr sz="1200" b="1">
+                          <a:latin typeface="Calibri"/>
+                        </a:rPr>
+                        <a:t>QEMU-derived activity factors</a:t>
+                      </a:r>
+                    </a:p>
+                  </a:txBody>
+                  <a:tcPr>
+                    <a:solidFill>
+                      <a:srgbClr val="FFFFFF"/>
+                    </a:solidFill>
+                  </a:tcPr>
+                </a:tc>
+                <a:tc>
+                  <a:txBody>
+                    <a:bodyPr/>
+                    <a:lstStyle/>
+                    <a:p>
+                      <a:r>
+                        <a:rPr sz="1200" b="1">
+                          <a:solidFill>
+                            <a:srgbClr val="187A33"/>
+                          </a:solidFill>
+                          <a:latin typeface="Calibri"/>
+                        </a:rPr>
+                        <a:t>6.3%</a:t>
+                      </a:r>
+                    </a:p>
+                  </a:txBody>
+                  <a:tcPr>
+                    <a:solidFill>
+                      <a:srgbClr val="FFFFFF"/>
+                    </a:solidFill>
+                  </a:tcPr>
+                </a:tc>
+                <a:tc>
+                  <a:txBody>
+                    <a:bodyPr/>
+                    <a:lstStyle/>
+                    <a:p>
+                      <a:r>
+                        <a:rPr sz="1200" b="1">
+                          <a:solidFill>
+                            <a:srgbClr val="187A33"/>
+                          </a:solidFill>
+                          <a:latin typeface="Calibri"/>
+                        </a:rPr>
+                        <a:t>14.8%</a:t>
+                      </a:r>
+                    </a:p>
+                  </a:txBody>
+                  <a:tcPr>
+                    <a:solidFill>
+                      <a:srgbClr val="FFFFFF"/>
+                    </a:solidFill>
+                  </a:tcPr>
+                </a:tc>
+                <a:tc>
+                  <a:txBody>
+                    <a:bodyPr/>
+                    <a:lstStyle/>
+                    <a:p>
+                      <a:r>
+                        <a:rPr sz="1200" b="0">
+                          <a:latin typeface="Calibri"/>
+                        </a:rPr>
+                        <a:t>a number per application, from the binary that will actually run</a:t>
+                      </a:r>
+                    </a:p>
+                  </a:txBody>
+                  <a:tcPr>
+                    <a:solidFill>
+                      <a:srgbClr val="FFFFFF"/>
+                    </a:solidFill>
+                  </a:tcPr>
+                </a:tc>
+              </a:tr>
+            </a:tbl>
+          </a:graphicData>
+        </a:graphic>
+      </p:graphicFrame>
+      <p:sp>
+        <p:nvSpPr>
+          <p:cNvPr id="11" name="TextBox 10"/>
+          <p:cNvSpPr txBox="1"/>
+          <p:nvPr/>
+        </p:nvSpPr>
+        <p:spPr>
+          <a:xfrm>
+            <a:off x="548640" y="3785615"/>
+            <a:ext cx="11064240" cy="292608"/>
+          </a:xfrm>
+          <a:prstGeom prst="rect">
+            <a:avLst/>
+          </a:prstGeom>
+          <a:noFill/>
+        </p:spPr>
+        <p:txBody>
+          <a:bodyPr wrap="square">
+            <a:spAutoFit/>
+          </a:bodyPr>
+          <a:lstStyle/>
+          <a:p>
+            <a:pPr algn="l"/>
+            <a:r>
+              <a:rPr sz="1150" b="1">
+                <a:solidFill>
+                  <a:srgbClr val="202124"/>
+                </a:solidFill>
+                <a:latin typeface="Verdana"/>
+              </a:rPr>
+              <a:t>Where the flat assumption breaks — and it is exactly where power decisions get made:</a:t>
+            </a:r>
+          </a:p>
+        </p:txBody>
+      </p:sp>
+      <p:graphicFrame>
+        <p:nvGraphicFramePr>
+          <p:cNvPr id="12" name="Table 11"/>
+          <p:cNvGraphicFramePr>
+            <a:graphicFrameLocks noGrp="1"/>
+          </p:cNvGraphicFramePr>
+          <p:nvPr/>
+        </p:nvGraphicFramePr>
+        <p:xfrm>
+          <a:off x="548640" y="4133087"/>
+          <a:ext cx="7223760" cy="1975104"/>
+        </p:xfrm>
+        <a:graphic>
+          <a:graphicData uri="http://schemas.openxmlformats.org/drawingml/2006/table">
+            <a:tbl>
+              <a:tblPr firstRow="1" bandRow="1">
+                <a:tableStyleId>{5C22544A-7EE6-4342-B048-85BDC9FD1C3A}</a:tableStyleId>
+              </a:tblPr>
+              <a:tblGrid>
+                <a:gridCol w="3108960"/>
+                <a:gridCol w="1463040"/>
+                <a:gridCol w="1325880"/>
+                <a:gridCol w="1325880"/>
+              </a:tblGrid>
+              <a:tr h="329184">
+                <a:tc>
+                  <a:txBody>
+                    <a:bodyPr/>
+                    <a:lstStyle/>
+                    <a:p>
+                      <a:r>
+                        <a:rPr sz="1100" b="1">
+                          <a:solidFill>
+                            <a:srgbClr val="FFFFFF"/>
+                          </a:solidFill>
+                          <a:latin typeface="Calibri"/>
+                        </a:rPr>
+                        <a:t>workload</a:t>
+                      </a:r>
+                    </a:p>
+                  </a:txBody>
+                  <a:tcPr>
+                    <a:solidFill>
+                      <a:srgbClr val="202124"/>
+                    </a:solidFill>
+                  </a:tcPr>
+                </a:tc>
+                <a:tc>
+                  <a:txBody>
+                    <a:bodyPr/>
+                    <a:lstStyle/>
+                    <a:p>
+                      <a:r>
+                        <a:rPr sz="1100" b="1">
+                          <a:solidFill>
+                            <a:srgbClr val="FFFFFF"/>
+                          </a:solidFill>
+                          <a:latin typeface="Calibri"/>
+                        </a:rPr>
+                        <a:t>kind</a:t>
+                      </a:r>
+                    </a:p>
+                  </a:txBody>
+                  <a:tcPr>
+                    <a:solidFill>
+                      <a:srgbClr val="202124"/>
+                    </a:solidFill>
+                  </a:tcPr>
+                </a:tc>
+                <a:tc>
+                  <a:txBody>
+                    <a:bodyPr/>
+                    <a:lstStyle/>
+                    <a:p>
+                      <a:r>
+                        <a:rPr sz="1100" b="1">
+                          <a:solidFill>
+                            <a:srgbClr val="FFFFFF"/>
+                          </a:solidFill>
+                          <a:latin typeface="Calibri"/>
+                        </a:rPr>
+                        <a:t>flat</a:t>
+                      </a:r>
+                    </a:p>
+                  </a:txBody>
+                  <a:tcPr>
+                    <a:solidFill>
+                      <a:srgbClr val="202124"/>
+                    </a:solidFill>
+                  </a:tcPr>
+                </a:tc>
+                <a:tc>
+                  <a:txBody>
+                    <a:bodyPr/>
+                    <a:lstStyle/>
+                    <a:p>
+                      <a:r>
+                        <a:rPr sz="1100" b="1">
+                          <a:solidFill>
+                            <a:srgbClr val="FFFFFF"/>
+                          </a:solidFill>
+                          <a:latin typeface="Calibri"/>
+                        </a:rPr>
+                        <a:t>QEMU</a:t>
+                      </a:r>
+                    </a:p>
+                  </a:txBody>
+                  <a:tcPr>
+                    <a:solidFill>
+                      <a:srgbClr val="202124"/>
+                    </a:solidFill>
+                  </a:tcPr>
+                </a:tc>
+              </a:tr>
+              <a:tr h="329184">
+                <a:tc>
+                  <a:txBody>
+                    <a:bodyPr/>
+                    <a:lstStyle/>
+                    <a:p>
+                      <a:r>
+                        <a:rPr sz="1100" b="1">
+                          <a:latin typeface="Calibri"/>
+                        </a:rPr>
+                        <a:t>mixed benchmark control</a:t>
+                      </a:r>
+                    </a:p>
+                  </a:txBody>
+                  <a:tcPr>
+                    <a:solidFill>
+                      <a:srgbClr val="EFF3F9"/>
+                    </a:solidFill>
+                  </a:tcPr>
+                </a:tc>
+                <a:tc>
+                  <a:txBody>
+                    <a:bodyPr/>
+                    <a:lstStyle/>
+                    <a:p>
+                      <a:r>
+                        <a:rPr sz="1100" b="0">
+                          <a:latin typeface="Calibri"/>
+                        </a:rPr>
+                        <a:t>concurrent</a:t>
+                      </a:r>
+                    </a:p>
+                  </a:txBody>
+                  <a:tcPr>
+                    <a:solidFill>
+                      <a:srgbClr val="EFF3F9"/>
+                    </a:solidFill>
+                  </a:tcPr>
+                </a:tc>
+                <a:tc>
+                  <a:txBody>
+                    <a:bodyPr/>
+                    <a:lstStyle/>
+                    <a:p>
+                      <a:r>
+                        <a:rPr sz="1100" b="1">
+                          <a:solidFill>
+                            <a:srgbClr val="B31412"/>
+                          </a:solidFill>
+                          <a:latin typeface="Calibri"/>
+                        </a:rPr>
+                        <a:t>49%</a:t>
+                      </a:r>
+                    </a:p>
+                  </a:txBody>
+                  <a:tcPr>
+                    <a:solidFill>
+                      <a:srgbClr val="EFF3F9"/>
+                    </a:solidFill>
+                  </a:tcPr>
+                </a:tc>
+                <a:tc>
+                  <a:txBody>
+                    <a:bodyPr/>
+                    <a:lstStyle/>
+                    <a:p>
+                      <a:r>
+                        <a:rPr sz="1100" b="1">
+                          <a:solidFill>
+                            <a:srgbClr val="187A33"/>
+                          </a:solidFill>
+                          <a:latin typeface="Calibri"/>
+                        </a:rPr>
+                        <a:t>6.5%</a:t>
+                      </a:r>
+                    </a:p>
+                  </a:txBody>
+                  <a:tcPr>
+                    <a:solidFill>
+                      <a:srgbClr val="EFF3F9"/>
+                    </a:solidFill>
+                  </a:tcPr>
+                </a:tc>
+              </a:tr>
+              <a:tr h="329184">
+                <a:tc>
+                  <a:txBody>
+                    <a:bodyPr/>
+                    <a:lstStyle/>
+                    <a:p>
+                      <a:r>
+                        <a:rPr sz="1100" b="1">
+                          <a:latin typeface="Calibri"/>
+                        </a:rPr>
+                        <a:t>six workloads, every core</a:t>
+                      </a:r>
+                    </a:p>
+                  </a:txBody>
+                  <a:tcPr>
+                    <a:solidFill>
+                      <a:srgbClr val="FFFFFF"/>
+                    </a:solidFill>
+                  </a:tcPr>
+                </a:tc>
+                <a:tc>
+                  <a:txBody>
+                    <a:bodyPr/>
+                    <a:lstStyle/>
+                    <a:p>
+                      <a:r>
+                        <a:rPr sz="1100" b="0">
+                          <a:latin typeface="Calibri"/>
+                        </a:rPr>
+                        <a:t>concurrent</a:t>
+                      </a:r>
+                    </a:p>
+                  </a:txBody>
+                  <a:tcPr>
+                    <a:solidFill>
+                      <a:srgbClr val="FFFFFF"/>
+                    </a:solidFill>
+                  </a:tcPr>
+                </a:tc>
+                <a:tc>
+                  <a:txBody>
+                    <a:bodyPr/>
+                    <a:lstStyle/>
+                    <a:p>
+                      <a:r>
+                        <a:rPr sz="1100" b="1">
+                          <a:solidFill>
+                            <a:srgbClr val="B31412"/>
+                          </a:solidFill>
+                          <a:latin typeface="Calibri"/>
+                        </a:rPr>
+                        <a:t>43%</a:t>
+                      </a:r>
+                    </a:p>
+                  </a:txBody>
+                  <a:tcPr>
+                    <a:solidFill>
+                      <a:srgbClr val="FFFFFF"/>
+                    </a:solidFill>
+                  </a:tcPr>
+                </a:tc>
+                <a:tc>
+                  <a:txBody>
+                    <a:bodyPr/>
+                    <a:lstStyle/>
+                    <a:p>
+                      <a:r>
+                        <a:rPr sz="1100" b="1">
+                          <a:solidFill>
+                            <a:srgbClr val="187A33"/>
+                          </a:solidFill>
+                          <a:latin typeface="Calibri"/>
+                        </a:rPr>
+                        <a:t>2.0%</a:t>
+                      </a:r>
+                    </a:p>
+                  </a:txBody>
+                  <a:tcPr>
+                    <a:solidFill>
+                      <a:srgbClr val="FFFFFF"/>
+                    </a:solidFill>
+                  </a:tcPr>
+                </a:tc>
+              </a:tr>
+              <a:tr h="329184">
+                <a:tc>
+                  <a:txBody>
+                    <a:bodyPr/>
+                    <a:lstStyle/>
+                    <a:p>
+                      <a:r>
+                        <a:rPr sz="1100" b="1">
+                          <a:latin typeface="Calibri"/>
+                        </a:rPr>
+                        <a:t>game + disparity + DB + net</a:t>
+                      </a:r>
+                    </a:p>
+                  </a:txBody>
+                  <a:tcPr>
+                    <a:solidFill>
+                      <a:srgbClr val="EFF3F9"/>
+                    </a:solidFill>
+                  </a:tcPr>
+                </a:tc>
+                <a:tc>
+                  <a:txBody>
+                    <a:bodyPr/>
+                    <a:lstStyle/>
+                    <a:p>
+                      <a:r>
+                        <a:rPr sz="1100" b="0">
+                          <a:latin typeface="Calibri"/>
+                        </a:rPr>
+                        <a:t>concurrent</a:t>
+                      </a:r>
+                    </a:p>
+                  </a:txBody>
+                  <a:tcPr>
+                    <a:solidFill>
+                      <a:srgbClr val="EFF3F9"/>
+                    </a:solidFill>
+                  </a:tcPr>
+                </a:tc>
+                <a:tc>
+                  <a:txBody>
+                    <a:bodyPr/>
+                    <a:lstStyle/>
+                    <a:p>
+                      <a:r>
+                        <a:rPr sz="1100" b="1">
+                          <a:solidFill>
+                            <a:srgbClr val="B31412"/>
+                          </a:solidFill>
+                          <a:latin typeface="Calibri"/>
+                        </a:rPr>
+                        <a:t>33%</a:t>
+                      </a:r>
+                    </a:p>
+                  </a:txBody>
+                  <a:tcPr>
+                    <a:solidFill>
+                      <a:srgbClr val="EFF3F9"/>
+                    </a:solidFill>
+                  </a:tcPr>
+                </a:tc>
+                <a:tc>
+                  <a:txBody>
+                    <a:bodyPr/>
+                    <a:lstStyle/>
+                    <a:p>
+                      <a:r>
+                        <a:rPr sz="1100" b="1">
+                          <a:solidFill>
+                            <a:srgbClr val="187A33"/>
+                          </a:solidFill>
+                          <a:latin typeface="Calibri"/>
+                        </a:rPr>
+                        <a:t>3.0%</a:t>
+                      </a:r>
+                    </a:p>
+                  </a:txBody>
+                  <a:tcPr>
+                    <a:solidFill>
+                      <a:srgbClr val="EFF3F9"/>
+                    </a:solidFill>
+                  </a:tcPr>
+                </a:tc>
+              </a:tr>
+              <a:tr h="329184">
+                <a:tc>
+                  <a:txBody>
+                    <a:bodyPr/>
+                    <a:lstStyle/>
+                    <a:p>
+                      <a:r>
+                        <a:rPr sz="1100" b="1">
+                          <a:latin typeface="Calibri"/>
+                        </a:rPr>
+                        <a:t>compute-bound control</a:t>
+                      </a:r>
+                    </a:p>
+                  </a:txBody>
+                  <a:tcPr>
+                    <a:solidFill>
+                      <a:srgbClr val="FFFFFF"/>
+                    </a:solidFill>
+                  </a:tcPr>
+                </a:tc>
+                <a:tc>
+                  <a:txBody>
+                    <a:bodyPr/>
+                    <a:lstStyle/>
+                    <a:p>
+                      <a:r>
+                        <a:rPr sz="1100" b="0">
+                          <a:latin typeface="Calibri"/>
+                        </a:rPr>
+                        <a:t>concurrent</a:t>
+                      </a:r>
+                    </a:p>
+                  </a:txBody>
+                  <a:tcPr>
+                    <a:solidFill>
+                      <a:srgbClr val="FFFFFF"/>
+                    </a:solidFill>
+                  </a:tcPr>
+                </a:tc>
+                <a:tc>
+                  <a:txBody>
+                    <a:bodyPr/>
+                    <a:lstStyle/>
+                    <a:p>
+                      <a:r>
+                        <a:rPr sz="1100" b="1">
+                          <a:solidFill>
+                            <a:srgbClr val="B31412"/>
+                          </a:solidFill>
+                          <a:latin typeface="Calibri"/>
+                        </a:rPr>
+                        <a:t>33%</a:t>
+                      </a:r>
+                    </a:p>
+                  </a:txBody>
+                  <a:tcPr>
+                    <a:solidFill>
+                      <a:srgbClr val="FFFFFF"/>
+                    </a:solidFill>
+                  </a:tcPr>
+                </a:tc>
+                <a:tc>
+                  <a:txBody>
+                    <a:bodyPr/>
+                    <a:lstStyle/>
+                    <a:p>
+                      <a:r>
+                        <a:rPr sz="1100" b="1">
+                          <a:solidFill>
+                            <a:srgbClr val="187A33"/>
+                          </a:solidFill>
+                          <a:latin typeface="Calibri"/>
+                        </a:rPr>
+                        <a:t>6.5%</a:t>
+                      </a:r>
+                    </a:p>
+                  </a:txBody>
+                  <a:tcPr>
+                    <a:solidFill>
+                      <a:srgbClr val="FFFFFF"/>
+                    </a:solidFill>
+                  </a:tcPr>
+                </a:tc>
+              </a:tr>
+              <a:tr h="329184">
+                <a:tc>
+                  <a:txBody>
+                    <a:bodyPr/>
+                    <a:lstStyle/>
+                    <a:p>
+                      <a:r>
+                        <a:rPr sz="1100" b="1">
+                          <a:latin typeface="Calibri"/>
+                        </a:rPr>
+                        <a:t>blit 256MB</a:t>
+                      </a:r>
+                    </a:p>
+                  </a:txBody>
+                  <a:tcPr>
+                    <a:solidFill>
+                      <a:srgbClr val="EFF3F9"/>
+                    </a:solidFill>
+                  </a:tcPr>
+                </a:tc>
+                <a:tc>
+                  <a:txBody>
+                    <a:bodyPr/>
+                    <a:lstStyle/>
+                    <a:p>
+                      <a:r>
+                        <a:rPr sz="1100" b="0">
+                          <a:latin typeface="Calibri"/>
+                        </a:rPr>
+                        <a:t>bandwidth</a:t>
+                      </a:r>
+                    </a:p>
+                  </a:txBody>
+                  <a:tcPr>
+                    <a:solidFill>
+                      <a:srgbClr val="EFF3F9"/>
+                    </a:solidFill>
+                  </a:tcPr>
+                </a:tc>
+                <a:tc>
+                  <a:txBody>
+                    <a:bodyPr/>
+                    <a:lstStyle/>
+                    <a:p>
+                      <a:r>
+                        <a:rPr sz="1100" b="1">
+                          <a:solidFill>
+                            <a:srgbClr val="B31412"/>
+                          </a:solidFill>
+                          <a:latin typeface="Calibri"/>
+                        </a:rPr>
+                        <a:t>25%</a:t>
+                      </a:r>
+                    </a:p>
+                  </a:txBody>
+                  <a:tcPr>
+                    <a:solidFill>
+                      <a:srgbClr val="EFF3F9"/>
+                    </a:solidFill>
+                  </a:tcPr>
+                </a:tc>
+                <a:tc>
+                  <a:txBody>
+                    <a:bodyPr/>
+                    <a:lstStyle/>
+                    <a:p>
+                      <a:r>
+                        <a:rPr sz="1100" b="1">
+                          <a:solidFill>
+                            <a:srgbClr val="187A33"/>
+                          </a:solidFill>
+                          <a:latin typeface="Calibri"/>
+                        </a:rPr>
+                        <a:t>12.0%</a:t>
+                      </a:r>
+                    </a:p>
+                  </a:txBody>
+                  <a:tcPr>
+                    <a:solidFill>
+                      <a:srgbClr val="EFF3F9"/>
+                    </a:solidFill>
+                  </a:tcPr>
+                </a:tc>
+              </a:tr>
+            </a:tbl>
+          </a:graphicData>
+        </a:graphic>
+      </p:graphicFrame>
+      <p:sp>
+        <p:nvSpPr>
+          <p:cNvPr id="13" name="Rounded Rectangle 12"/>
+          <p:cNvSpPr/>
+          <p:nvPr/>
+        </p:nvSpPr>
+        <p:spPr>
+          <a:xfrm>
+            <a:off x="7973568" y="4133087"/>
+            <a:ext cx="3639312" cy="1975104"/>
+          </a:xfrm>
+          <a:prstGeom prst="roundRect">
+            <a:avLst/>
+          </a:prstGeom>
+          <a:solidFill>
+            <a:srgbClr val="FDF6EC"/>
+          </a:solidFill>
+          <a:ln>
+            <a:solidFill>
+              <a:srgbClr val="B06000"/>
+            </a:solidFill>
+          </a:ln>
+        </p:spPr>
+        <p:style>
+          <a:lnRef idx="1">
+            <a:schemeClr val="accent1"/>
+          </a:lnRef>
+          <a:fillRef idx="3">
+            <a:schemeClr val="accent1"/>
+          </a:fillRef>
+          <a:effectRef idx="2">
+            <a:schemeClr val="accent1"/>
+          </a:effectRef>
+          <a:fontRef idx="minor">
+            <a:schemeClr val="lt1"/>
+          </a:fontRef>
+        </p:style>
+        <p:txBody>
+          <a:bodyPr rtlCol="0" anchor="ctr"/>
+          <a:lstStyle/>
+          <a:p>
+            <a:pPr algn="ctr"/>
+          </a:p>
+        </p:txBody>
+      </p:sp>
+      <p:sp>
+        <p:nvSpPr>
+          <p:cNvPr id="14" name="TextBox 13"/>
+          <p:cNvSpPr txBox="1"/>
+          <p:nvPr/>
+        </p:nvSpPr>
+        <p:spPr>
+          <a:xfrm>
+            <a:off x="8193024" y="4242816"/>
+            <a:ext cx="3200400" cy="1783080"/>
+          </a:xfrm>
+          <a:prstGeom prst="rect">
+            <a:avLst/>
+          </a:prstGeom>
+          <a:noFill/>
+        </p:spPr>
+        <p:txBody>
+          <a:bodyPr wrap="square">
+            <a:spAutoFit/>
+          </a:bodyPr>
+          <a:lstStyle/>
+          <a:p>
+            <a:pPr algn="l"/>
+            <a:r>
+              <a:rPr sz="1050" b="0">
+                <a:solidFill>
+                  <a:srgbClr val="202124"/>
+                </a:solidFill>
+                <a:latin typeface="Verdana"/>
+              </a:rPr>
+              <a:t>Stated against ourselves:
+The constant (1457 mW) was fitted on the very measurements it predicts. Pre-silicon you could not pick it — that number IS the answer being computed.
+And on the 50 single-core applications alone, spanning only 1.4x, the constant wins on the mean. Per-application activity earns its place on the tails, not the average.</a:t>
+            </a:r>
+          </a:p>
+        </p:txBody>
+      </p:sp>
+      <p:sp>
+        <p:nvSpPr>
+          <p:cNvPr id="15" name="TextBox 14"/>
+          <p:cNvSpPr txBox="1"/>
+          <p:nvPr/>
+        </p:nvSpPr>
+        <p:spPr>
+          <a:xfrm>
+            <a:off x="548640" y="6199632"/>
+            <a:ext cx="11064240" cy="310896"/>
+          </a:xfrm>
+          <a:prstGeom prst="rect">
+            <a:avLst/>
+          </a:prstGeom>
+          <a:noFill/>
+        </p:spPr>
+        <p:txBody>
+          <a:bodyPr wrap="square">
+            <a:spAutoFit/>
+          </a:bodyPr>
+          <a:lstStyle/>
+          <a:p>
+            <a:pPr algn="l"/>
+            <a:r>
+              <a:rPr sz="1150" b="1">
+                <a:solidFill>
+                  <a:srgbClr val="1F5CA8"/>
+                </a:solidFill>
+                <a:latin typeface="Verdana"/>
+              </a:rPr>
+              <a:t>The useful claim is not that the emulator is right — it is that a traceable number beats one nobody can tie to a workload.</a:t>
             </a:r>
           </a:p>
         </p:txBody>
